--- a/yazilim_test_muhendisligi.pptx
+++ b/yazilim_test_muhendisligi.pptx
@@ -4,6 +4,9 @@
   <p:sldMasterIdLst>
     <p:sldMasterId id="2147483648" r:id="rId1"/>
   </p:sldMasterIdLst>
+  <p:notesMasterIdLst>
+    <p:notesMasterId r:id="rId10"/>
+  </p:notesMasterIdLst>
   <p:sldIdLst>
     <p:sldId id="256" r:id="rId2"/>
     <p:sldId id="257" r:id="rId3"/>
@@ -12,11 +15,9 @@
     <p:sldId id="260" r:id="rId6"/>
     <p:sldId id="261" r:id="rId7"/>
     <p:sldId id="262" r:id="rId8"/>
+    <p:sldId id="263" r:id="rId9"/>
   </p:sldIdLst>
-  <p:notesMasterIdLst>
-    <p:notesMasterId r:id="rId9"/>
-  </p:notesMasterIdLst>
-  <p:sldSz cx="9144000" cy="5143500"/>
+  <p:sldSz cx="9144000" cy="5143500" type="screen16x9"/>
   <p:notesSz cx="5143500" cy="9144000"/>
   <p:defaultTextStyle>
     <a:lvl1pPr marL="0" algn="l" defTabSz="914400" rtl="0" eaLnBrk="1" latinLnBrk="0" hangingPunct="1">
@@ -110,6 +111,11 @@
       </a:defRPr>
     </a:lvl9pPr>
   </p:defaultTextStyle>
+  <p:extLst>
+    <p:ext uri="{EFAFB233-063F-42B5-8137-9DF3F51BA10A}">
+      <p15:sldGuideLst xmlns:p15="http://schemas.microsoft.com/office/powerpoint/2012/main"/>
+    </p:ext>
+  </p:extLst>
 </p:presentation>
 </file>
 
@@ -135,234 +141,10 @@
           <a:chExt cx="0" cy="0"/>
         </a:xfrm>
       </p:grpSpPr>
-      <p:sp>
-        <p:nvSpPr>
-          <p:cNvPr id="2" name="Header Placeholder 1"/>
-          <p:cNvSpPr>
-            <a:spLocks noGrp="1"/>
-          </p:cNvSpPr>
-          <p:nvPr>
-            <p:ph type="hdr" sz="quarter"/>
-          </p:nvPr>
-        </p:nvSpPr>
-        <p:spPr>
-          <a:xfrm>
-            <a:off x="0" y="0"/>
-            <a:ext cx="2971800" cy="458788"/>
-          </a:xfrm>
-          <a:prstGeom prst="rect">
-            <a:avLst/>
-          </a:prstGeom>
-        </p:spPr>
-        <p:txBody>
-          <a:bodyPr vert="horz" lIns="91440" tIns="45720" rIns="91440" bIns="45720" rtlCol="0"/>
-          <a:lstStyle>
-            <a:lvl1pPr algn="l">
-              <a:defRPr sz="1200"/>
-            </a:lvl1pPr>
-          </a:lstStyle>
-          <a:p>
-            <a:endParaRPr lang="en-US"/>
-          </a:p>
-        </p:txBody>
-      </p:sp>
-      <p:sp>
-        <p:nvSpPr>
-          <p:cNvPr id="3" name="Date Placeholder 2"/>
-          <p:cNvSpPr>
-            <a:spLocks noGrp="1"/>
-          </p:cNvSpPr>
-          <p:nvPr>
-            <p:ph type="dt" idx="1"/>
-          </p:nvPr>
-        </p:nvSpPr>
-        <p:spPr>
-          <a:xfrm>
-            <a:off x="3884613" y="0"/>
-            <a:ext cx="2971800" cy="458788"/>
-          </a:xfrm>
-          <a:prstGeom prst="rect">
-            <a:avLst/>
-          </a:prstGeom>
-        </p:spPr>
-        <p:txBody>
-          <a:bodyPr vert="horz" lIns="91440" tIns="45720" rIns="91440" bIns="45720" rtlCol="0"/>
-          <a:lstStyle>
-            <a:lvl1pPr algn="r">
-              <a:defRPr sz="1200"/>
-            </a:lvl1pPr>
-          </a:lstStyle>
-          <a:p>
-            <a:fld id="{5282F153-3F37-0F45-9E97-73ACFA13230C}" type="datetimeFigureOut">
-              <a:rPr lang="en-US"/>
-              <a:t>7/23/19</a:t>
-            </a:fld>
-            <a:endParaRPr lang="en-US"/>
-          </a:p>
-        </p:txBody>
-      </p:sp>
-      <p:sp>
-        <p:nvSpPr>
-          <p:cNvPr id="4" name="Slide Image Placeholder 3"/>
-          <p:cNvSpPr>
-            <a:spLocks noGrp="1" noRot="1" noChangeAspect="1"/>
-          </p:cNvSpPr>
-          <p:nvPr>
-            <p:ph type="sldImg" idx="2"/>
-          </p:nvPr>
-        </p:nvSpPr>
-        <p:spPr>
-          <a:xfrm>
-            <a:off x="685800" y="1143000"/>
-            <a:ext cx="5486400" cy="3086100"/>
-          </a:xfrm>
-          <a:prstGeom prst="rect">
-            <a:avLst/>
-          </a:prstGeom>
-          <a:noFill/>
-          <a:ln w="12700">
-            <a:solidFill>
-              <a:prstClr val="black"/>
-            </a:solidFill>
-          </a:ln>
-        </p:spPr>
-        <p:txBody>
-          <a:bodyPr vert="horz" lIns="91440" tIns="45720" rIns="91440" bIns="45720" rtlCol="0" anchor="ctr"/>
-          <a:lstStyle/>
-          <a:p>
-            <a:endParaRPr lang="en-US"/>
-          </a:p>
-        </p:txBody>
-      </p:sp>
-      <p:sp>
-        <p:nvSpPr>
-          <p:cNvPr id="5" name="Notes Placeholder 4"/>
-          <p:cNvSpPr>
-            <a:spLocks noGrp="1"/>
-          </p:cNvSpPr>
-          <p:nvPr>
-            <p:ph type="body" sz="quarter" idx="3"/>
-          </p:nvPr>
-        </p:nvSpPr>
-        <p:spPr>
-          <a:xfrm>
-            <a:off x="685800" y="4400550"/>
-            <a:ext cx="5486400" cy="3600450"/>
-          </a:xfrm>
-          <a:prstGeom prst="rect">
-            <a:avLst/>
-          </a:prstGeom>
-        </p:spPr>
-        <p:txBody>
-          <a:bodyPr vert="horz" lIns="91440" tIns="45720" rIns="91440" bIns="45720" rtlCol="0"/>
-          <a:lstStyle/>
-          <a:p>
-            <a:pPr lvl="0"/>
-            <a:r>
-              <a:rPr lang="en-US"/>
-              <a:t>Click to edit Master text styles</a:t>
-            </a:r>
-          </a:p>
-          <a:p>
-            <a:pPr lvl="1"/>
-            <a:r>
-              <a:rPr lang="en-US"/>
-              <a:t>Second level</a:t>
-            </a:r>
-          </a:p>
-          <a:p>
-            <a:pPr lvl="2"/>
-            <a:r>
-              <a:rPr lang="en-US"/>
-              <a:t>Third level</a:t>
-            </a:r>
-          </a:p>
-          <a:p>
-            <a:pPr lvl="3"/>
-            <a:r>
-              <a:rPr lang="en-US"/>
-              <a:t>Fourth level</a:t>
-            </a:r>
-          </a:p>
-          <a:p>
-            <a:pPr lvl="4"/>
-            <a:r>
-              <a:rPr lang="en-US"/>
-              <a:t>Fifth level</a:t>
-            </a:r>
-          </a:p>
-        </p:txBody>
-      </p:sp>
-      <p:sp>
-        <p:nvSpPr>
-          <p:cNvPr id="6" name="Footer Placeholder 5"/>
-          <p:cNvSpPr>
-            <a:spLocks noGrp="1"/>
-          </p:cNvSpPr>
-          <p:nvPr>
-            <p:ph type="ftr" sz="quarter" idx="4"/>
-          </p:nvPr>
-        </p:nvSpPr>
-        <p:spPr>
-          <a:xfrm>
-            <a:off x="0" y="8685213"/>
-            <a:ext cx="2971800" cy="458787"/>
-          </a:xfrm>
-          <a:prstGeom prst="rect">
-            <a:avLst/>
-          </a:prstGeom>
-        </p:spPr>
-        <p:txBody>
-          <a:bodyPr vert="horz" lIns="91440" tIns="45720" rIns="91440" bIns="45720" rtlCol="0" anchor="b"/>
-          <a:lstStyle>
-            <a:lvl1pPr algn="l">
-              <a:defRPr sz="1200"/>
-            </a:lvl1pPr>
-          </a:lstStyle>
-          <a:p>
-            <a:endParaRPr lang="en-US"/>
-          </a:p>
-        </p:txBody>
-      </p:sp>
-      <p:sp>
-        <p:nvSpPr>
-          <p:cNvPr id="7" name="Slide Number Placeholder 6"/>
-          <p:cNvSpPr>
-            <a:spLocks noGrp="1"/>
-          </p:cNvSpPr>
-          <p:nvPr>
-            <p:ph type="sldNum" sz="quarter" idx="5"/>
-          </p:nvPr>
-        </p:nvSpPr>
-        <p:spPr>
-          <a:xfrm>
-            <a:off x="3884613" y="8685213"/>
-            <a:ext cx="2971800" cy="458787"/>
-          </a:xfrm>
-          <a:prstGeom prst="rect">
-            <a:avLst/>
-          </a:prstGeom>
-        </p:spPr>
-        <p:txBody>
-          <a:bodyPr vert="horz" lIns="91440" tIns="45720" rIns="91440" bIns="45720" rtlCol="0" anchor="b"/>
-          <a:lstStyle>
-            <a:lvl1pPr algn="r">
-              <a:defRPr sz="1200"/>
-            </a:lvl1pPr>
-          </a:lstStyle>
-          <a:p>
-            <a:fld id="{CE5E9CC1-C706-0F49-92D6-E571CC5EEA8F}" type="slidenum">
-              <a:rPr lang="en-US"/>
-              <a:t>‹#›</a:t>
-            </a:fld>
-            <a:endParaRPr lang="en-US"/>
-          </a:p>
-        </p:txBody>
-      </p:sp>
     </p:spTree>
     <p:extLst>
       <p:ext uri="{BB962C8B-B14F-4D97-AF65-F5344CB8AC3E}">
-        <p14:creationId xmlns:p14="http://schemas.microsoft.com/office/powerpoint/2010/main" val="1024086991"/>
+        <p14:creationId xmlns:p14="http://schemas.microsoft.com/office/powerpoint/2010/main" val="3229039257"/>
       </p:ext>
     </p:extLst>
   </p:cSld>
@@ -506,10 +288,6 @@
           <a:bodyPr/>
           <a:lstStyle/>
           <a:p>
-            <a:r>
-              <a:rPr lang="en-US" dirty="0"/>
-              <a:t/>
-            </a:r>
             <a:endParaRPr lang="en-US" dirty="0"/>
           </a:p>
         </p:txBody>
@@ -594,10 +372,6 @@
           <a:bodyPr/>
           <a:lstStyle/>
           <a:p>
-            <a:r>
-              <a:rPr lang="en-US" dirty="0"/>
-              <a:t/>
-            </a:r>
             <a:endParaRPr lang="en-US" dirty="0"/>
           </a:p>
         </p:txBody>
@@ -682,10 +456,6 @@
           <a:bodyPr/>
           <a:lstStyle/>
           <a:p>
-            <a:r>
-              <a:rPr lang="en-US" dirty="0"/>
-              <a:t/>
-            </a:r>
             <a:endParaRPr lang="en-US" dirty="0"/>
           </a:p>
         </p:txBody>
@@ -770,10 +540,6 @@
           <a:bodyPr/>
           <a:lstStyle/>
           <a:p>
-            <a:r>
-              <a:rPr lang="en-US" dirty="0"/>
-              <a:t/>
-            </a:r>
             <a:endParaRPr lang="en-US" dirty="0"/>
           </a:p>
         </p:txBody>
@@ -858,10 +624,6 @@
           <a:bodyPr/>
           <a:lstStyle/>
           <a:p>
-            <a:r>
-              <a:rPr lang="en-US" dirty="0"/>
-              <a:t/>
-            </a:r>
             <a:endParaRPr lang="en-US" dirty="0"/>
           </a:p>
         </p:txBody>
@@ -946,10 +708,6 @@
           <a:bodyPr/>
           <a:lstStyle/>
           <a:p>
-            <a:r>
-              <a:rPr lang="en-US" dirty="0"/>
-              <a:t/>
-            </a:r>
             <a:endParaRPr lang="en-US" dirty="0"/>
           </a:p>
         </p:txBody>
@@ -1034,10 +792,6 @@
           <a:bodyPr/>
           <a:lstStyle/>
           <a:p>
-            <a:r>
-              <a:rPr lang="en-US" dirty="0"/>
-              <a:t/>
-            </a:r>
             <a:endParaRPr lang="en-US" dirty="0"/>
           </a:p>
         </p:txBody>
@@ -1069,6 +823,90 @@
     <p:extLst>
       <p:ext uri="{BB962C8B-B14F-4D97-AF65-F5344CB8AC3E}">
         <p14:creationId xmlns:p14="http://schemas.microsoft.com/office/powerpoint/2010/main" val="1024086991"/>
+      </p:ext>
+    </p:extLst>
+  </p:cSld>
+  <p:clrMapOvr>
+    <a:masterClrMapping/>
+  </p:clrMapOvr>
+</p:notes>
+</file>
+
+<file path=ppt/notesSlides/notesSlide8.xml><?xml version="1.0" encoding="utf-8"?>
+<p:notes xmlns:a="http://schemas.openxmlformats.org/drawingml/2006/main" xmlns:r="http://schemas.openxmlformats.org/officeDocument/2006/relationships" xmlns:p="http://schemas.openxmlformats.org/presentationml/2006/main">
+  <p:cSld>
+    <p:spTree>
+      <p:nvGrpSpPr>
+        <p:cNvPr id="1" name=""/>
+        <p:cNvGrpSpPr/>
+        <p:nvPr/>
+      </p:nvGrpSpPr>
+      <p:grpSpPr>
+        <a:xfrm>
+          <a:off x="0" y="0"/>
+          <a:ext cx="0" cy="0"/>
+          <a:chOff x="0" y="0"/>
+          <a:chExt cx="0" cy="0"/>
+        </a:xfrm>
+      </p:grpSpPr>
+      <p:sp>
+        <p:nvSpPr>
+          <p:cNvPr id="2" name="Slide Image Placeholder 1"/>
+          <p:cNvSpPr>
+            <a:spLocks noGrp="1" noRot="1" noChangeAspect="1"/>
+          </p:cNvSpPr>
+          <p:nvPr>
+            <p:ph type="sldImg"/>
+          </p:nvPr>
+        </p:nvSpPr>
+        <p:spPr/>
+      </p:sp>
+      <p:sp>
+        <p:nvSpPr>
+          <p:cNvPr id="3" name="Notes Placeholder 2"/>
+          <p:cNvSpPr>
+            <a:spLocks noGrp="1"/>
+          </p:cNvSpPr>
+          <p:nvPr>
+            <p:ph type="body" idx="1"/>
+          </p:nvPr>
+        </p:nvSpPr>
+        <p:spPr/>
+        <p:txBody>
+          <a:bodyPr/>
+          <a:lstStyle/>
+          <a:p>
+            <a:endParaRPr lang="en-US" dirty="0"/>
+          </a:p>
+        </p:txBody>
+      </p:sp>
+      <p:sp>
+        <p:nvSpPr>
+          <p:cNvPr id="4" name="Slide Number Placeholder 3"/>
+          <p:cNvSpPr>
+            <a:spLocks noGrp="1"/>
+          </p:cNvSpPr>
+          <p:nvPr>
+            <p:ph type="sldNum" sz="quarter" idx="10"/>
+          </p:nvPr>
+        </p:nvSpPr>
+        <p:spPr/>
+        <p:txBody>
+          <a:bodyPr/>
+          <a:lstStyle/>
+          <a:p>
+            <a:fld id="{F7021451-1387-4CA6-816F-3879F97B5CBC}" type="slidenum">
+              <a:rPr lang="en-US"/>
+              <a:t>8</a:t>
+            </a:fld>
+            <a:endParaRPr lang="en-US"/>
+          </a:p>
+        </p:txBody>
+      </p:sp>
+    </p:spTree>
+    <p:extLst>
+      <p:ext uri="{BB962C8B-B14F-4D97-AF65-F5344CB8AC3E}">
+        <p14:creationId xmlns:p14="http://schemas.microsoft.com/office/powerpoint/2010/main" val="3831564857"/>
       </p:ext>
     </p:extLst>
   </p:cSld>
@@ -1111,6 +949,11 @@
 <file path=ppt/slideMasters/slideMaster1.xml><?xml version="1.0" encoding="utf-8"?>
 <p:sldMaster xmlns:a="http://schemas.openxmlformats.org/drawingml/2006/main" xmlns:r="http://schemas.openxmlformats.org/officeDocument/2006/relationships" xmlns:p="http://schemas.openxmlformats.org/presentationml/2006/main">
   <p:cSld>
+    <p:bg>
+      <p:bgRef idx="1001">
+        <a:schemeClr val="bg1"/>
+      </p:bgRef>
+    </p:bg>
     <p:spTree>
       <p:nvGrpSpPr>
         <p:cNvPr id="1" name=""/>
@@ -1393,6 +1236,7 @@
         <a:solidFill>
           <a:srgbClr val="0D1B2A"/>
         </a:solidFill>
+        <a:effectLst/>
       </p:bgPr>
     </p:bg>
     <p:spTree>
@@ -1431,14 +1275,14 @@
       </p:sp>
       <p:pic>
         <p:nvPicPr>
-          <p:cNvPr id="3" name="Image 0" descr="preencoded.png">    </p:cNvPr>
+          <p:cNvPr id="3" name="Image 0" descr="preencoded.png"/>
           <p:cNvPicPr>
             <a:picLocks noChangeAspect="1"/>
           </p:cNvPicPr>
           <p:nvPr/>
         </p:nvPicPr>
         <p:blipFill>
-          <a:blip r:embed="rId1"/>
+          <a:blip r:embed="rId3"/>
           <a:stretch>
             <a:fillRect/>
           </a:stretch>
@@ -1474,7 +1318,7 @@
           <a:bodyPr wrap="square" lIns="0" tIns="0" rIns="0" bIns="0" rtlCol="0" anchor="ctr"/>
           <a:lstStyle/>
           <a:p>
-            <a:pPr indent="0" marL="0">
+            <a:pPr marL="0" indent="0">
               <a:buNone/>
             </a:pPr>
             <a:r>
@@ -1513,7 +1357,7 @@
           <a:bodyPr wrap="square" lIns="0" tIns="0" rIns="0" bIns="0" rtlCol="0" anchor="ctr"/>
           <a:lstStyle/>
           <a:p>
-            <a:pPr indent="0" marL="0">
+            <a:pPr marL="0" indent="0">
               <a:buNone/>
             </a:pPr>
             <a:r>
@@ -1552,7 +1396,7 @@
           <a:bodyPr wrap="square" lIns="0" tIns="0" rIns="0" bIns="0" rtlCol="0" anchor="ctr"/>
           <a:lstStyle/>
           <a:p>
-            <a:pPr indent="0" marL="0">
+            <a:pPr marL="0" indent="0">
               <a:buNone/>
             </a:pPr>
             <a:r>
@@ -1611,7 +1455,7 @@
           <a:bodyPr wrap="square" lIns="0" tIns="0" rIns="0" bIns="0" rtlCol="0" anchor="ctr"/>
           <a:lstStyle/>
           <a:p>
-            <a:pPr indent="0" marL="0">
+            <a:pPr marL="0" indent="0">
               <a:buNone/>
             </a:pPr>
             <a:r>
@@ -1645,6 +1489,7 @@
         <a:solidFill>
           <a:srgbClr val="F4F7FA"/>
         </a:solidFill>
+        <a:effectLst/>
       </p:bgPr>
     </p:bg>
     <p:spTree>
@@ -1683,414 +1528,7 @@
       </p:sp>
       <p:pic>
         <p:nvPicPr>
-          <p:cNvPr id="3" name="Image 0" descr="preencoded.png">    </p:cNvPr>
-          <p:cNvPicPr>
-            <a:picLocks noChangeAspect="1"/>
-          </p:cNvPicPr>
-          <p:nvPr/>
-        </p:nvPicPr>
-        <p:blipFill>
-          <a:blip r:embed="rId1"/>
-          <a:stretch>
-            <a:fillRect/>
-          </a:stretch>
-        </p:blipFill>
-        <p:spPr>
-          <a:xfrm>
-            <a:off x="228600" y="228600"/>
-            <a:ext cx="502920" cy="502920"/>
-          </a:xfrm>
-          <a:prstGeom prst="rect">
-            <a:avLst/>
-          </a:prstGeom>
-        </p:spPr>
-      </p:pic>
-      <p:sp>
-        <p:nvSpPr>
-          <p:cNvPr id="4" name="Text 1"/>
-          <p:cNvSpPr/>
-          <p:nvPr/>
-        </p:nvSpPr>
-        <p:spPr>
-          <a:xfrm>
-            <a:off x="868680" y="164592"/>
-            <a:ext cx="7863840" cy="594360"/>
-          </a:xfrm>
-          <a:prstGeom prst="rect">
-            <a:avLst/>
-          </a:prstGeom>
-          <a:noFill/>
-          <a:ln/>
-        </p:spPr>
-        <p:txBody>
-          <a:bodyPr wrap="square" lIns="0" tIns="0" rIns="0" bIns="0" rtlCol="0" anchor="ctr"/>
-          <a:lstStyle/>
-          <a:p>
-            <a:pPr indent="0" marL="0">
-              <a:buNone/>
-            </a:pPr>
-            <a:r>
-              <a:rPr lang="en-US" sz="2800" b="1" dirty="0">
-                <a:solidFill>
-                  <a:srgbClr val="FFFFFF"/>
-                </a:solidFill>
-                <a:latin typeface="Calibri" pitchFamily="34" charset="0"/>
-                <a:ea typeface="Calibri" pitchFamily="34" charset="-122"/>
-                <a:cs typeface="Calibri" pitchFamily="34" charset="-120"/>
-              </a:rPr>
-              <a:t>Yazılım Testi Nedir?</a:t>
-            </a:r>
-            <a:endParaRPr lang="en-US" sz="2800" dirty="0"/>
-          </a:p>
-        </p:txBody>
-      </p:sp>
-      <p:sp>
-        <p:nvSpPr>
-          <p:cNvPr id="5" name="Shape 2"/>
-          <p:cNvSpPr/>
-          <p:nvPr/>
-        </p:nvSpPr>
-        <p:spPr>
-          <a:xfrm>
-            <a:off x="320040" y="1097280"/>
-            <a:ext cx="4114800" cy="3474720"/>
-          </a:xfrm>
-          <a:prstGeom prst="rect">
-            <a:avLst/>
-          </a:prstGeom>
-          <a:solidFill>
-            <a:srgbClr val="FFFFFF"/>
-          </a:solidFill>
-          <a:ln/>
-          <a:effectLst>
-            <a:outerShdw sx="100000" sy="100000" kx="0" ky="0" algn="bl" rotWithShape="0" blurRad="101600" dist="25400" dir="8100000">
-              <a:srgbClr val="000000">
-                <a:alpha val="12000"/>
-              </a:srgbClr>
-            </a:outerShdw>
-          </a:effectLst>
-        </p:spPr>
-      </p:sp>
-      <p:sp>
-        <p:nvSpPr>
-          <p:cNvPr id="6" name="Shape 3"/>
-          <p:cNvSpPr/>
-          <p:nvPr/>
-        </p:nvSpPr>
-        <p:spPr>
-          <a:xfrm>
-            <a:off x="320040" y="1097280"/>
-            <a:ext cx="4114800" cy="109728"/>
-          </a:xfrm>
-          <a:prstGeom prst="rect">
-            <a:avLst/>
-          </a:prstGeom>
-          <a:solidFill>
-            <a:srgbClr val="028090"/>
-          </a:solidFill>
-          <a:ln/>
-        </p:spPr>
-      </p:sp>
-      <p:sp>
-        <p:nvSpPr>
-          <p:cNvPr id="7" name="Text 4"/>
-          <p:cNvSpPr/>
-          <p:nvPr/>
-        </p:nvSpPr>
-        <p:spPr>
-          <a:xfrm>
-            <a:off x="457200" y="1234440"/>
-            <a:ext cx="3840480" cy="411480"/>
-          </a:xfrm>
-          <a:prstGeom prst="rect">
-            <a:avLst/>
-          </a:prstGeom>
-          <a:noFill/>
-          <a:ln/>
-        </p:spPr>
-        <p:txBody>
-          <a:bodyPr wrap="square" lIns="0" tIns="0" rIns="0" bIns="0" rtlCol="0" anchor="ctr"/>
-          <a:lstStyle/>
-          <a:p>
-            <a:pPr indent="0" marL="0">
-              <a:buNone/>
-            </a:pPr>
-            <a:r>
-              <a:rPr lang="en-US" sz="1800" b="1" dirty="0">
-                <a:solidFill>
-                  <a:srgbClr val="028090"/>
-                </a:solidFill>
-                <a:latin typeface="Calibri" pitchFamily="34" charset="0"/>
-                <a:ea typeface="Calibri" pitchFamily="34" charset="-122"/>
-                <a:cs typeface="Calibri" pitchFamily="34" charset="-120"/>
-              </a:rPr>
-              <a:t>Tanım</a:t>
-            </a:r>
-            <a:endParaRPr lang="en-US" sz="1800" dirty="0"/>
-          </a:p>
-        </p:txBody>
-      </p:sp>
-      <p:sp>
-        <p:nvSpPr>
-          <p:cNvPr id="8" name="Text 5"/>
-          <p:cNvSpPr/>
-          <p:nvPr/>
-        </p:nvSpPr>
-        <p:spPr>
-          <a:xfrm>
-            <a:off x="457200" y="1737360"/>
-            <a:ext cx="3749040" cy="2560320"/>
-          </a:xfrm>
-          <a:prstGeom prst="rect">
-            <a:avLst/>
-          </a:prstGeom>
-          <a:noFill/>
-          <a:ln/>
-        </p:spPr>
-        <p:txBody>
-          <a:bodyPr wrap="square" rtlCol="0" anchor="t"/>
-          <a:lstStyle/>
-          <a:p>
-            <a:pPr indent="0" marL="0">
-              <a:buNone/>
-            </a:pPr>
-            <a:r>
-              <a:rPr lang="en-US" sz="1400" dirty="0">
-                <a:solidFill>
-                  <a:srgbClr val="1E293B"/>
-                </a:solidFill>
-                <a:latin typeface="Calibri" pitchFamily="34" charset="0"/>
-                <a:ea typeface="Calibri" pitchFamily="34" charset="-122"/>
-                <a:cs typeface="Calibri" pitchFamily="34" charset="-120"/>
-              </a:rPr>
-              <a:t>Yazılım testi; bir uygulamanın beklendiği gibi çalışıp çalışmadığını doğrulamak için yapılan sistematik süreçtir.</a:t>
-            </a:r>
-            <a:endParaRPr lang="en-US" sz="1400" dirty="0"/>
-          </a:p>
-          <a:p>
-            <a:pPr indent="0" marL="0">
-              <a:buNone/>
-            </a:pPr>
-            <a:endParaRPr lang="en-US" sz="1400" dirty="0"/>
-          </a:p>
-          <a:p>
-            <a:pPr indent="0" marL="0">
-              <a:buNone/>
-            </a:pPr>
-            <a:r>
-              <a:rPr lang="en-US" sz="1400" dirty="0">
-                <a:solidFill>
-                  <a:srgbClr val="1E293B"/>
-                </a:solidFill>
-                <a:latin typeface="Calibri" pitchFamily="34" charset="0"/>
-                <a:ea typeface="Calibri" pitchFamily="34" charset="-122"/>
-                <a:cs typeface="Calibri" pitchFamily="34" charset="-120"/>
-              </a:rPr>
-              <a:t>Hataları erken aşamada tespit etmek, yazılım kalitesini artırmak ve kullanıcı memnuniyetini sağlamak temel hedeflerdir.</a:t>
-            </a:r>
-            <a:endParaRPr lang="en-US" sz="1400" dirty="0"/>
-          </a:p>
-        </p:txBody>
-      </p:sp>
-      <p:sp>
-        <p:nvSpPr>
-          <p:cNvPr id="9" name="Shape 6"/>
-          <p:cNvSpPr/>
-          <p:nvPr/>
-        </p:nvSpPr>
-        <p:spPr>
-          <a:xfrm>
-            <a:off x="4709160" y="1097280"/>
-            <a:ext cx="4114800" cy="1005840"/>
-          </a:xfrm>
-          <a:prstGeom prst="rect">
-            <a:avLst/>
-          </a:prstGeom>
-          <a:solidFill>
-            <a:srgbClr val="FFFFFF"/>
-          </a:solidFill>
-          <a:ln/>
-          <a:effectLst>
-            <a:outerShdw sx="100000" sy="100000" kx="0" ky="0" algn="bl" rotWithShape="0" blurRad="101600" dist="25400" dir="8100000">
-              <a:srgbClr val="000000">
-                <a:alpha val="10000"/>
-              </a:srgbClr>
-            </a:outerShdw>
-          </a:effectLst>
-        </p:spPr>
-      </p:sp>
-      <p:sp>
-        <p:nvSpPr>
-          <p:cNvPr id="10" name="Shape 7"/>
-          <p:cNvSpPr/>
-          <p:nvPr/>
-        </p:nvSpPr>
-        <p:spPr>
-          <a:xfrm>
-            <a:off x="4709160" y="1097280"/>
-            <a:ext cx="109728" cy="1005840"/>
-          </a:xfrm>
-          <a:prstGeom prst="rect">
-            <a:avLst/>
-          </a:prstGeom>
-          <a:solidFill>
-            <a:srgbClr val="028090"/>
-          </a:solidFill>
-          <a:ln/>
-        </p:spPr>
-      </p:sp>
-      <p:pic>
-        <p:nvPicPr>
-          <p:cNvPr id="11" name="Image 1" descr="preencoded.png">    </p:cNvPr>
-          <p:cNvPicPr>
-            <a:picLocks noChangeAspect="1"/>
-          </p:cNvPicPr>
-          <p:nvPr/>
-        </p:nvPicPr>
-        <p:blipFill>
-          <a:blip r:embed="rId2"/>
-          <a:stretch>
-            <a:fillRect/>
-          </a:stretch>
-        </p:blipFill>
-        <p:spPr>
-          <a:xfrm>
-            <a:off x="4892040" y="1353312"/>
-            <a:ext cx="457200" cy="457200"/>
-          </a:xfrm>
-          <a:prstGeom prst="rect">
-            <a:avLst/>
-          </a:prstGeom>
-        </p:spPr>
-      </p:pic>
-      <p:sp>
-        <p:nvSpPr>
-          <p:cNvPr id="12" name="Text 8"/>
-          <p:cNvSpPr/>
-          <p:nvPr/>
-        </p:nvSpPr>
-        <p:spPr>
-          <a:xfrm>
-            <a:off x="5440680" y="1188720"/>
-            <a:ext cx="3291840" cy="365760"/>
-          </a:xfrm>
-          <a:prstGeom prst="rect">
-            <a:avLst/>
-          </a:prstGeom>
-          <a:noFill/>
-          <a:ln/>
-        </p:spPr>
-        <p:txBody>
-          <a:bodyPr wrap="square" lIns="0" tIns="0" rIns="0" bIns="0" rtlCol="0" anchor="ctr"/>
-          <a:lstStyle/>
-          <a:p>
-            <a:pPr indent="0" marL="0">
-              <a:buNone/>
-            </a:pPr>
-            <a:r>
-              <a:rPr lang="en-US" sz="1600" b="1" dirty="0">
-                <a:solidFill>
-                  <a:srgbClr val="0D1B2A"/>
-                </a:solidFill>
-                <a:latin typeface="Calibri" pitchFamily="34" charset="0"/>
-                <a:ea typeface="Calibri" pitchFamily="34" charset="-122"/>
-                <a:cs typeface="Calibri" pitchFamily="34" charset="-120"/>
-              </a:rPr>
-              <a:t>Doğrulama</a:t>
-            </a:r>
-            <a:endParaRPr lang="en-US" sz="1600" dirty="0"/>
-          </a:p>
-        </p:txBody>
-      </p:sp>
-      <p:sp>
-        <p:nvSpPr>
-          <p:cNvPr id="13" name="Text 9"/>
-          <p:cNvSpPr/>
-          <p:nvPr/>
-        </p:nvSpPr>
-        <p:spPr>
-          <a:xfrm>
-            <a:off x="5440680" y="1572768"/>
-            <a:ext cx="3291840" cy="411480"/>
-          </a:xfrm>
-          <a:prstGeom prst="rect">
-            <a:avLst/>
-          </a:prstGeom>
-          <a:noFill/>
-          <a:ln/>
-        </p:spPr>
-        <p:txBody>
-          <a:bodyPr wrap="square" lIns="0" tIns="0" rIns="0" bIns="0" rtlCol="0" anchor="ctr"/>
-          <a:lstStyle/>
-          <a:p>
-            <a:pPr indent="0" marL="0">
-              <a:buNone/>
-            </a:pPr>
-            <a:r>
-              <a:rPr lang="en-US" sz="1200" dirty="0">
-                <a:solidFill>
-                  <a:srgbClr val="1E293B"/>
-                </a:solidFill>
-                <a:latin typeface="Calibri" pitchFamily="34" charset="0"/>
-                <a:ea typeface="Calibri" pitchFamily="34" charset="-122"/>
-                <a:cs typeface="Calibri" pitchFamily="34" charset="-120"/>
-              </a:rPr>
-              <a:t>Yazılımın gereksinimlere uygunluğunu kontrol eder</a:t>
-            </a:r>
-            <a:endParaRPr lang="en-US" sz="1200" dirty="0"/>
-          </a:p>
-        </p:txBody>
-      </p:sp>
-      <p:sp>
-        <p:nvSpPr>
-          <p:cNvPr id="14" name="Shape 10"/>
-          <p:cNvSpPr/>
-          <p:nvPr/>
-        </p:nvSpPr>
-        <p:spPr>
-          <a:xfrm>
-            <a:off x="4709160" y="2286000"/>
-            <a:ext cx="4114800" cy="1005840"/>
-          </a:xfrm>
-          <a:prstGeom prst="rect">
-            <a:avLst/>
-          </a:prstGeom>
-          <a:solidFill>
-            <a:srgbClr val="FFFFFF"/>
-          </a:solidFill>
-          <a:ln/>
-          <a:effectLst>
-            <a:outerShdw sx="100000" sy="100000" kx="0" ky="0" algn="bl" rotWithShape="0" blurRad="101600" dist="25400" dir="8100000">
-              <a:srgbClr val="000000">
-                <a:alpha val="10000"/>
-              </a:srgbClr>
-            </a:outerShdw>
-          </a:effectLst>
-        </p:spPr>
-      </p:sp>
-      <p:sp>
-        <p:nvSpPr>
-          <p:cNvPr id="15" name="Shape 11"/>
-          <p:cNvSpPr/>
-          <p:nvPr/>
-        </p:nvSpPr>
-        <p:spPr>
-          <a:xfrm>
-            <a:off x="4709160" y="2286000"/>
-            <a:ext cx="109728" cy="1005840"/>
-          </a:xfrm>
-          <a:prstGeom prst="rect">
-            <a:avLst/>
-          </a:prstGeom>
-          <a:solidFill>
-            <a:srgbClr val="028090"/>
-          </a:solidFill>
-          <a:ln/>
-        </p:spPr>
-      </p:sp>
-      <p:pic>
-        <p:nvPicPr>
-          <p:cNvPr id="16" name="Image 2" descr="preencoded.png">    </p:cNvPr>
+          <p:cNvPr id="3" name="Image 0" descr="preencoded.png"/>
           <p:cNvPicPr>
             <a:picLocks noChangeAspect="1"/>
           </p:cNvPicPr>
@@ -2104,8 +1542,8 @@
         </p:blipFill>
         <p:spPr>
           <a:xfrm>
-            <a:off x="4892040" y="2542032"/>
-            <a:ext cx="457200" cy="457200"/>
+            <a:off x="228600" y="228600"/>
+            <a:ext cx="502920" cy="502920"/>
           </a:xfrm>
           <a:prstGeom prst="rect">
             <a:avLst/>
@@ -2114,14 +1552,14 @@
       </p:pic>
       <p:sp>
         <p:nvSpPr>
-          <p:cNvPr id="17" name="Text 12"/>
-          <p:cNvSpPr/>
-          <p:nvPr/>
-        </p:nvSpPr>
-        <p:spPr>
-          <a:xfrm>
-            <a:off x="5440680" y="2377440"/>
-            <a:ext cx="3291840" cy="365760"/>
+          <p:cNvPr id="4" name="Text 1"/>
+          <p:cNvSpPr/>
+          <p:nvPr/>
+        </p:nvSpPr>
+        <p:spPr>
+          <a:xfrm>
+            <a:off x="868680" y="164592"/>
+            <a:ext cx="7863840" cy="594360"/>
           </a:xfrm>
           <a:prstGeom prst="rect">
             <a:avLst/>
@@ -2133,34 +1571,81 @@
           <a:bodyPr wrap="square" lIns="0" tIns="0" rIns="0" bIns="0" rtlCol="0" anchor="ctr"/>
           <a:lstStyle/>
           <a:p>
-            <a:pPr indent="0" marL="0">
-              <a:buNone/>
-            </a:pPr>
-            <a:r>
-              <a:rPr lang="en-US" sz="1600" b="1" dirty="0">
-                <a:solidFill>
-                  <a:srgbClr val="0D1B2A"/>
-                </a:solidFill>
-                <a:latin typeface="Calibri" pitchFamily="34" charset="0"/>
-                <a:ea typeface="Calibri" pitchFamily="34" charset="-122"/>
-                <a:cs typeface="Calibri" pitchFamily="34" charset="-120"/>
-              </a:rPr>
-              <a:t>Güvenilirlik</a:t>
-            </a:r>
-            <a:endParaRPr lang="en-US" sz="1600" dirty="0"/>
-          </a:p>
-        </p:txBody>
-      </p:sp>
-      <p:sp>
-        <p:nvSpPr>
-          <p:cNvPr id="18" name="Text 13"/>
-          <p:cNvSpPr/>
-          <p:nvPr/>
-        </p:nvSpPr>
-        <p:spPr>
-          <a:xfrm>
-            <a:off x="5440680" y="2761488"/>
-            <a:ext cx="3291840" cy="411480"/>
+            <a:pPr marL="0" indent="0">
+              <a:buNone/>
+            </a:pPr>
+            <a:r>
+              <a:rPr lang="en-US" sz="2800" b="1" dirty="0">
+                <a:solidFill>
+                  <a:srgbClr val="FFFFFF"/>
+                </a:solidFill>
+                <a:latin typeface="Calibri" pitchFamily="34" charset="0"/>
+                <a:ea typeface="Calibri" pitchFamily="34" charset="-122"/>
+                <a:cs typeface="Calibri" pitchFamily="34" charset="-120"/>
+              </a:rPr>
+              <a:t>Yazılım Testi Nedir?</a:t>
+            </a:r>
+            <a:endParaRPr lang="en-US" sz="2800" dirty="0"/>
+          </a:p>
+        </p:txBody>
+      </p:sp>
+      <p:sp>
+        <p:nvSpPr>
+          <p:cNvPr id="5" name="Shape 2"/>
+          <p:cNvSpPr/>
+          <p:nvPr/>
+        </p:nvSpPr>
+        <p:spPr>
+          <a:xfrm>
+            <a:off x="320040" y="1097280"/>
+            <a:ext cx="4114800" cy="3474720"/>
+          </a:xfrm>
+          <a:prstGeom prst="rect">
+            <a:avLst/>
+          </a:prstGeom>
+          <a:solidFill>
+            <a:srgbClr val="FFFFFF"/>
+          </a:solidFill>
+          <a:ln/>
+          <a:effectLst>
+            <a:outerShdw blurRad="101600" dist="25400" dir="8100000" algn="bl" rotWithShape="0">
+              <a:srgbClr val="000000">
+                <a:alpha val="12000"/>
+              </a:srgbClr>
+            </a:outerShdw>
+          </a:effectLst>
+        </p:spPr>
+      </p:sp>
+      <p:sp>
+        <p:nvSpPr>
+          <p:cNvPr id="6" name="Shape 3"/>
+          <p:cNvSpPr/>
+          <p:nvPr/>
+        </p:nvSpPr>
+        <p:spPr>
+          <a:xfrm>
+            <a:off x="320040" y="1097280"/>
+            <a:ext cx="4114800" cy="109728"/>
+          </a:xfrm>
+          <a:prstGeom prst="rect">
+            <a:avLst/>
+          </a:prstGeom>
+          <a:solidFill>
+            <a:srgbClr val="028090"/>
+          </a:solidFill>
+          <a:ln/>
+        </p:spPr>
+      </p:sp>
+      <p:sp>
+        <p:nvSpPr>
+          <p:cNvPr id="7" name="Text 4"/>
+          <p:cNvSpPr/>
+          <p:nvPr/>
+        </p:nvSpPr>
+        <p:spPr>
+          <a:xfrm>
+            <a:off x="457200" y="1234440"/>
+            <a:ext cx="3840480" cy="411480"/>
           </a:xfrm>
           <a:prstGeom prst="rect">
             <a:avLst/>
@@ -2172,11 +1657,50 @@
           <a:bodyPr wrap="square" lIns="0" tIns="0" rIns="0" bIns="0" rtlCol="0" anchor="ctr"/>
           <a:lstStyle/>
           <a:p>
-            <a:pPr indent="0" marL="0">
-              <a:buNone/>
-            </a:pPr>
-            <a:r>
-              <a:rPr lang="en-US" sz="1200" dirty="0">
+            <a:pPr marL="0" indent="0">
+              <a:buNone/>
+            </a:pPr>
+            <a:r>
+              <a:rPr lang="en-US" sz="1800" b="1" dirty="0">
+                <a:solidFill>
+                  <a:srgbClr val="028090"/>
+                </a:solidFill>
+                <a:latin typeface="Calibri" pitchFamily="34" charset="0"/>
+                <a:ea typeface="Calibri" pitchFamily="34" charset="-122"/>
+                <a:cs typeface="Calibri" pitchFamily="34" charset="-120"/>
+              </a:rPr>
+              <a:t>Tanım</a:t>
+            </a:r>
+            <a:endParaRPr lang="en-US" sz="1800" dirty="0"/>
+          </a:p>
+        </p:txBody>
+      </p:sp>
+      <p:sp>
+        <p:nvSpPr>
+          <p:cNvPr id="8" name="Text 5"/>
+          <p:cNvSpPr/>
+          <p:nvPr/>
+        </p:nvSpPr>
+        <p:spPr>
+          <a:xfrm>
+            <a:off x="457200" y="1737360"/>
+            <a:ext cx="3749040" cy="2560320"/>
+          </a:xfrm>
+          <a:prstGeom prst="rect">
+            <a:avLst/>
+          </a:prstGeom>
+          <a:noFill/>
+          <a:ln/>
+        </p:spPr>
+        <p:txBody>
+          <a:bodyPr wrap="square" rtlCol="0" anchor="t"/>
+          <a:lstStyle/>
+          <a:p>
+            <a:pPr marL="0" indent="0">
+              <a:buNone/>
+            </a:pPr>
+            <a:r>
+              <a:rPr lang="en-US" sz="1400" dirty="0">
                 <a:solidFill>
                   <a:srgbClr val="1E293B"/>
                 </a:solidFill>
@@ -2184,21 +1708,44 @@
                 <a:ea typeface="Calibri" pitchFamily="34" charset="-122"/>
                 <a:cs typeface="Calibri" pitchFamily="34" charset="-120"/>
               </a:rPr>
-              <a:t>Sistemin stabil ve güvenli çalışmasını sağlar</a:t>
-            </a:r>
-            <a:endParaRPr lang="en-US" sz="1200" dirty="0"/>
-          </a:p>
-        </p:txBody>
-      </p:sp>
-      <p:sp>
-        <p:nvSpPr>
-          <p:cNvPr id="19" name="Shape 14"/>
-          <p:cNvSpPr/>
-          <p:nvPr/>
-        </p:nvSpPr>
-        <p:spPr>
-          <a:xfrm>
-            <a:off x="4709160" y="3474720"/>
+              <a:t>Yazılım testi; bir uygulamanın beklendiği gibi çalışıp çalışmadığını doğrulamak için yapılan sistematik süreçtir.</a:t>
+            </a:r>
+            <a:endParaRPr lang="en-US" sz="1400" dirty="0"/>
+          </a:p>
+          <a:p>
+            <a:pPr marL="0" indent="0">
+              <a:buNone/>
+            </a:pPr>
+            <a:endParaRPr lang="en-US" sz="1400" dirty="0"/>
+          </a:p>
+          <a:p>
+            <a:pPr marL="0" indent="0">
+              <a:buNone/>
+            </a:pPr>
+            <a:r>
+              <a:rPr lang="en-US" sz="1400" dirty="0">
+                <a:solidFill>
+                  <a:srgbClr val="1E293B"/>
+                </a:solidFill>
+                <a:latin typeface="Calibri" pitchFamily="34" charset="0"/>
+                <a:ea typeface="Calibri" pitchFamily="34" charset="-122"/>
+                <a:cs typeface="Calibri" pitchFamily="34" charset="-120"/>
+              </a:rPr>
+              <a:t>Hataları erken aşamada tespit etmek, yazılım kalitesini artırmak ve kullanıcı memnuniyetini sağlamak temel hedeflerdir.</a:t>
+            </a:r>
+            <a:endParaRPr lang="en-US" sz="1400" dirty="0"/>
+          </a:p>
+        </p:txBody>
+      </p:sp>
+      <p:sp>
+        <p:nvSpPr>
+          <p:cNvPr id="9" name="Shape 6"/>
+          <p:cNvSpPr/>
+          <p:nvPr/>
+        </p:nvSpPr>
+        <p:spPr>
+          <a:xfrm>
+            <a:off x="4709160" y="1097280"/>
             <a:ext cx="4114800" cy="1005840"/>
           </a:xfrm>
           <a:prstGeom prst="rect">
@@ -2209,7 +1756,7 @@
           </a:solidFill>
           <a:ln/>
           <a:effectLst>
-            <a:outerShdw sx="100000" sy="100000" kx="0" ky="0" algn="bl" rotWithShape="0" blurRad="101600" dist="25400" dir="8100000">
+            <a:outerShdw blurRad="101600" dist="25400" dir="8100000" algn="bl" rotWithShape="0">
               <a:srgbClr val="000000">
                 <a:alpha val="10000"/>
               </a:srgbClr>
@@ -2219,13 +1766,13 @@
       </p:sp>
       <p:sp>
         <p:nvSpPr>
-          <p:cNvPr id="20" name="Shape 15"/>
-          <p:cNvSpPr/>
-          <p:nvPr/>
-        </p:nvSpPr>
-        <p:spPr>
-          <a:xfrm>
-            <a:off x="4709160" y="3474720"/>
+          <p:cNvPr id="10" name="Shape 7"/>
+          <p:cNvSpPr/>
+          <p:nvPr/>
+        </p:nvSpPr>
+        <p:spPr>
+          <a:xfrm>
+            <a:off x="4709160" y="1097280"/>
             <a:ext cx="109728" cy="1005840"/>
           </a:xfrm>
           <a:prstGeom prst="rect">
@@ -2239,7 +1786,7 @@
       </p:sp>
       <p:pic>
         <p:nvPicPr>
-          <p:cNvPr id="21" name="Image 3" descr="preencoded.png">    </p:cNvPr>
+          <p:cNvPr id="11" name="Image 1" descr="preencoded.png"/>
           <p:cNvPicPr>
             <a:picLocks noChangeAspect="1"/>
           </p:cNvPicPr>
@@ -2253,6 +1800,304 @@
         </p:blipFill>
         <p:spPr>
           <a:xfrm>
+            <a:off x="4892040" y="1353312"/>
+            <a:ext cx="457200" cy="457200"/>
+          </a:xfrm>
+          <a:prstGeom prst="rect">
+            <a:avLst/>
+          </a:prstGeom>
+        </p:spPr>
+      </p:pic>
+      <p:sp>
+        <p:nvSpPr>
+          <p:cNvPr id="12" name="Text 8"/>
+          <p:cNvSpPr/>
+          <p:nvPr/>
+        </p:nvSpPr>
+        <p:spPr>
+          <a:xfrm>
+            <a:off x="5440680" y="1188720"/>
+            <a:ext cx="3291840" cy="365760"/>
+          </a:xfrm>
+          <a:prstGeom prst="rect">
+            <a:avLst/>
+          </a:prstGeom>
+          <a:noFill/>
+          <a:ln/>
+        </p:spPr>
+        <p:txBody>
+          <a:bodyPr wrap="square" lIns="0" tIns="0" rIns="0" bIns="0" rtlCol="0" anchor="ctr"/>
+          <a:lstStyle/>
+          <a:p>
+            <a:pPr marL="0" indent="0">
+              <a:buNone/>
+            </a:pPr>
+            <a:r>
+              <a:rPr lang="en-US" sz="1600" b="1" dirty="0">
+                <a:solidFill>
+                  <a:srgbClr val="0D1B2A"/>
+                </a:solidFill>
+                <a:latin typeface="Calibri" pitchFamily="34" charset="0"/>
+                <a:ea typeface="Calibri" pitchFamily="34" charset="-122"/>
+                <a:cs typeface="Calibri" pitchFamily="34" charset="-120"/>
+              </a:rPr>
+              <a:t>Doğrulama</a:t>
+            </a:r>
+            <a:endParaRPr lang="en-US" sz="1600" dirty="0"/>
+          </a:p>
+        </p:txBody>
+      </p:sp>
+      <p:sp>
+        <p:nvSpPr>
+          <p:cNvPr id="13" name="Text 9"/>
+          <p:cNvSpPr/>
+          <p:nvPr/>
+        </p:nvSpPr>
+        <p:spPr>
+          <a:xfrm>
+            <a:off x="5440680" y="1572768"/>
+            <a:ext cx="3291840" cy="411480"/>
+          </a:xfrm>
+          <a:prstGeom prst="rect">
+            <a:avLst/>
+          </a:prstGeom>
+          <a:noFill/>
+          <a:ln/>
+        </p:spPr>
+        <p:txBody>
+          <a:bodyPr wrap="square" lIns="0" tIns="0" rIns="0" bIns="0" rtlCol="0" anchor="ctr"/>
+          <a:lstStyle/>
+          <a:p>
+            <a:pPr marL="0" indent="0">
+              <a:buNone/>
+            </a:pPr>
+            <a:r>
+              <a:rPr lang="en-US" sz="1200" dirty="0">
+                <a:solidFill>
+                  <a:srgbClr val="1E293B"/>
+                </a:solidFill>
+                <a:latin typeface="Calibri" pitchFamily="34" charset="0"/>
+                <a:ea typeface="Calibri" pitchFamily="34" charset="-122"/>
+                <a:cs typeface="Calibri" pitchFamily="34" charset="-120"/>
+              </a:rPr>
+              <a:t>Yazılımın gereksinimlere uygunluğunu kontrol eder</a:t>
+            </a:r>
+            <a:endParaRPr lang="en-US" sz="1200" dirty="0"/>
+          </a:p>
+        </p:txBody>
+      </p:sp>
+      <p:sp>
+        <p:nvSpPr>
+          <p:cNvPr id="14" name="Shape 10"/>
+          <p:cNvSpPr/>
+          <p:nvPr/>
+        </p:nvSpPr>
+        <p:spPr>
+          <a:xfrm>
+            <a:off x="4709160" y="2286000"/>
+            <a:ext cx="4114800" cy="1005840"/>
+          </a:xfrm>
+          <a:prstGeom prst="rect">
+            <a:avLst/>
+          </a:prstGeom>
+          <a:solidFill>
+            <a:srgbClr val="FFFFFF"/>
+          </a:solidFill>
+          <a:ln/>
+          <a:effectLst>
+            <a:outerShdw blurRad="101600" dist="25400" dir="8100000" algn="bl" rotWithShape="0">
+              <a:srgbClr val="000000">
+                <a:alpha val="10000"/>
+              </a:srgbClr>
+            </a:outerShdw>
+          </a:effectLst>
+        </p:spPr>
+      </p:sp>
+      <p:sp>
+        <p:nvSpPr>
+          <p:cNvPr id="15" name="Shape 11"/>
+          <p:cNvSpPr/>
+          <p:nvPr/>
+        </p:nvSpPr>
+        <p:spPr>
+          <a:xfrm>
+            <a:off x="4709160" y="2286000"/>
+            <a:ext cx="109728" cy="1005840"/>
+          </a:xfrm>
+          <a:prstGeom prst="rect">
+            <a:avLst/>
+          </a:prstGeom>
+          <a:solidFill>
+            <a:srgbClr val="028090"/>
+          </a:solidFill>
+          <a:ln/>
+        </p:spPr>
+      </p:sp>
+      <p:pic>
+        <p:nvPicPr>
+          <p:cNvPr id="16" name="Image 2" descr="preencoded.png"/>
+          <p:cNvPicPr>
+            <a:picLocks noChangeAspect="1"/>
+          </p:cNvPicPr>
+          <p:nvPr/>
+        </p:nvPicPr>
+        <p:blipFill>
+          <a:blip r:embed="rId5"/>
+          <a:stretch>
+            <a:fillRect/>
+          </a:stretch>
+        </p:blipFill>
+        <p:spPr>
+          <a:xfrm>
+            <a:off x="4892040" y="2542032"/>
+            <a:ext cx="457200" cy="457200"/>
+          </a:xfrm>
+          <a:prstGeom prst="rect">
+            <a:avLst/>
+          </a:prstGeom>
+        </p:spPr>
+      </p:pic>
+      <p:sp>
+        <p:nvSpPr>
+          <p:cNvPr id="17" name="Text 12"/>
+          <p:cNvSpPr/>
+          <p:nvPr/>
+        </p:nvSpPr>
+        <p:spPr>
+          <a:xfrm>
+            <a:off x="5440680" y="2377440"/>
+            <a:ext cx="3291840" cy="365760"/>
+          </a:xfrm>
+          <a:prstGeom prst="rect">
+            <a:avLst/>
+          </a:prstGeom>
+          <a:noFill/>
+          <a:ln/>
+        </p:spPr>
+        <p:txBody>
+          <a:bodyPr wrap="square" lIns="0" tIns="0" rIns="0" bIns="0" rtlCol="0" anchor="ctr"/>
+          <a:lstStyle/>
+          <a:p>
+            <a:pPr marL="0" indent="0">
+              <a:buNone/>
+            </a:pPr>
+            <a:r>
+              <a:rPr lang="en-US" sz="1600" b="1" dirty="0">
+                <a:solidFill>
+                  <a:srgbClr val="0D1B2A"/>
+                </a:solidFill>
+                <a:latin typeface="Calibri" pitchFamily="34" charset="0"/>
+                <a:ea typeface="Calibri" pitchFamily="34" charset="-122"/>
+                <a:cs typeface="Calibri" pitchFamily="34" charset="-120"/>
+              </a:rPr>
+              <a:t>Güvenilirlik</a:t>
+            </a:r>
+            <a:endParaRPr lang="en-US" sz="1600" dirty="0"/>
+          </a:p>
+        </p:txBody>
+      </p:sp>
+      <p:sp>
+        <p:nvSpPr>
+          <p:cNvPr id="18" name="Text 13"/>
+          <p:cNvSpPr/>
+          <p:nvPr/>
+        </p:nvSpPr>
+        <p:spPr>
+          <a:xfrm>
+            <a:off x="5440680" y="2761488"/>
+            <a:ext cx="3291840" cy="411480"/>
+          </a:xfrm>
+          <a:prstGeom prst="rect">
+            <a:avLst/>
+          </a:prstGeom>
+          <a:noFill/>
+          <a:ln/>
+        </p:spPr>
+        <p:txBody>
+          <a:bodyPr wrap="square" lIns="0" tIns="0" rIns="0" bIns="0" rtlCol="0" anchor="ctr"/>
+          <a:lstStyle/>
+          <a:p>
+            <a:pPr marL="0" indent="0">
+              <a:buNone/>
+            </a:pPr>
+            <a:r>
+              <a:rPr lang="en-US" sz="1200" dirty="0">
+                <a:solidFill>
+                  <a:srgbClr val="1E293B"/>
+                </a:solidFill>
+                <a:latin typeface="Calibri" pitchFamily="34" charset="0"/>
+                <a:ea typeface="Calibri" pitchFamily="34" charset="-122"/>
+                <a:cs typeface="Calibri" pitchFamily="34" charset="-120"/>
+              </a:rPr>
+              <a:t>Sistemin stabil ve güvenli çalışmasını sağlar</a:t>
+            </a:r>
+            <a:endParaRPr lang="en-US" sz="1200" dirty="0"/>
+          </a:p>
+        </p:txBody>
+      </p:sp>
+      <p:sp>
+        <p:nvSpPr>
+          <p:cNvPr id="19" name="Shape 14"/>
+          <p:cNvSpPr/>
+          <p:nvPr/>
+        </p:nvSpPr>
+        <p:spPr>
+          <a:xfrm>
+            <a:off x="4709160" y="3474720"/>
+            <a:ext cx="4114800" cy="1005840"/>
+          </a:xfrm>
+          <a:prstGeom prst="rect">
+            <a:avLst/>
+          </a:prstGeom>
+          <a:solidFill>
+            <a:srgbClr val="FFFFFF"/>
+          </a:solidFill>
+          <a:ln/>
+          <a:effectLst>
+            <a:outerShdw blurRad="101600" dist="25400" dir="8100000" algn="bl" rotWithShape="0">
+              <a:srgbClr val="000000">
+                <a:alpha val="10000"/>
+              </a:srgbClr>
+            </a:outerShdw>
+          </a:effectLst>
+        </p:spPr>
+      </p:sp>
+      <p:sp>
+        <p:nvSpPr>
+          <p:cNvPr id="20" name="Shape 15"/>
+          <p:cNvSpPr/>
+          <p:nvPr/>
+        </p:nvSpPr>
+        <p:spPr>
+          <a:xfrm>
+            <a:off x="4709160" y="3474720"/>
+            <a:ext cx="109728" cy="1005840"/>
+          </a:xfrm>
+          <a:prstGeom prst="rect">
+            <a:avLst/>
+          </a:prstGeom>
+          <a:solidFill>
+            <a:srgbClr val="028090"/>
+          </a:solidFill>
+          <a:ln/>
+        </p:spPr>
+      </p:sp>
+      <p:pic>
+        <p:nvPicPr>
+          <p:cNvPr id="21" name="Image 3" descr="preencoded.png"/>
+          <p:cNvPicPr>
+            <a:picLocks noChangeAspect="1"/>
+          </p:cNvPicPr>
+          <p:nvPr/>
+        </p:nvPicPr>
+        <p:blipFill>
+          <a:blip r:embed="rId6"/>
+          <a:stretch>
+            <a:fillRect/>
+          </a:stretch>
+        </p:blipFill>
+        <p:spPr>
+          <a:xfrm>
             <a:off x="4892040" y="3730752"/>
             <a:ext cx="457200" cy="457200"/>
           </a:xfrm>
@@ -2282,7 +2127,7 @@
           <a:bodyPr wrap="square" lIns="0" tIns="0" rIns="0" bIns="0" rtlCol="0" anchor="ctr"/>
           <a:lstStyle/>
           <a:p>
-            <a:pPr indent="0" marL="0">
+            <a:pPr marL="0" indent="0">
               <a:buNone/>
             </a:pPr>
             <a:r>
@@ -2321,7 +2166,7 @@
           <a:bodyPr wrap="square" lIns="0" tIns="0" rIns="0" bIns="0" rtlCol="0" anchor="ctr"/>
           <a:lstStyle/>
           <a:p>
-            <a:pPr indent="0" marL="0">
+            <a:pPr marL="0" indent="0">
               <a:buNone/>
             </a:pPr>
             <a:r>
@@ -2355,6 +2200,7 @@
         <a:solidFill>
           <a:srgbClr val="F4F7FA"/>
         </a:solidFill>
+        <a:effectLst/>
       </p:bgPr>
     </p:bg>
     <p:spTree>
@@ -2393,14 +2239,14 @@
       </p:sp>
       <p:pic>
         <p:nvPicPr>
-          <p:cNvPr id="3" name="Image 0" descr="preencoded.png">    </p:cNvPr>
+          <p:cNvPr id="3" name="Image 0" descr="preencoded.png"/>
           <p:cNvPicPr>
             <a:picLocks noChangeAspect="1"/>
           </p:cNvPicPr>
           <p:nvPr/>
         </p:nvPicPr>
         <p:blipFill>
-          <a:blip r:embed="rId1"/>
+          <a:blip r:embed="rId3"/>
           <a:stretch>
             <a:fillRect/>
           </a:stretch>
@@ -2436,7 +2282,7 @@
           <a:bodyPr wrap="square" lIns="0" tIns="0" rIns="0" bIns="0" rtlCol="0" anchor="ctr"/>
           <a:lstStyle/>
           <a:p>
-            <a:pPr indent="0" marL="0">
+            <a:pPr marL="0" indent="0">
               <a:buNone/>
             </a:pPr>
             <a:r>
@@ -2473,7 +2319,7 @@
           </a:solidFill>
           <a:ln/>
           <a:effectLst>
-            <a:outerShdw sx="100000" sy="100000" kx="0" ky="0" algn="bl" rotWithShape="0" blurRad="101600" dist="25400" dir="8100000">
+            <a:outerShdw blurRad="101600" dist="25400" dir="8100000" algn="bl" rotWithShape="0">
               <a:srgbClr val="000000">
                 <a:alpha val="10000"/>
               </a:srgbClr>
@@ -2522,7 +2368,7 @@
           <a:bodyPr wrap="square" lIns="0" tIns="0" rIns="0" bIns="0" rtlCol="0" anchor="ctr"/>
           <a:lstStyle/>
           <a:p>
-            <a:pPr indent="0" marL="0">
+            <a:pPr marL="0" indent="0">
               <a:buNone/>
             </a:pPr>
             <a:r>
@@ -2561,7 +2407,7 @@
           <a:bodyPr wrap="square" lIns="0" tIns="0" rIns="0" bIns="0" rtlCol="0" anchor="ctr"/>
           <a:lstStyle/>
           <a:p>
-            <a:pPr algn="ctr" indent="0" marL="0">
+            <a:pPr marL="0" indent="0" algn="ctr">
               <a:buNone/>
             </a:pPr>
             <a:r>
@@ -2600,7 +2446,7 @@
           <a:bodyPr wrap="square" lIns="0" tIns="0" rIns="0" bIns="0" rtlCol="0" anchor="ctr"/>
           <a:lstStyle/>
           <a:p>
-            <a:pPr algn="ctr" indent="0" marL="0">
+            <a:pPr marL="0" indent="0" algn="ctr">
               <a:buNone/>
             </a:pPr>
             <a:r>
@@ -2659,7 +2505,7 @@
           <a:bodyPr wrap="square" rtlCol="0" anchor="t"/>
           <a:lstStyle/>
           <a:p>
-            <a:pPr algn="ctr" indent="0" marL="0">
+            <a:pPr marL="0" indent="0" algn="ctr">
               <a:buNone/>
             </a:pPr>
             <a:r>
@@ -2696,7 +2542,7 @@
           </a:solidFill>
           <a:ln/>
           <a:effectLst>
-            <a:outerShdw sx="100000" sy="100000" kx="0" ky="0" algn="bl" rotWithShape="0" blurRad="101600" dist="25400" dir="8100000">
+            <a:outerShdw blurRad="101600" dist="25400" dir="8100000" algn="bl" rotWithShape="0">
               <a:srgbClr val="000000">
                 <a:alpha val="10000"/>
               </a:srgbClr>
@@ -2745,7 +2591,7 @@
           <a:bodyPr wrap="square" lIns="0" tIns="0" rIns="0" bIns="0" rtlCol="0" anchor="ctr"/>
           <a:lstStyle/>
           <a:p>
-            <a:pPr indent="0" marL="0">
+            <a:pPr marL="0" indent="0">
               <a:buNone/>
             </a:pPr>
             <a:r>
@@ -2784,7 +2630,7 @@
           <a:bodyPr wrap="square" lIns="0" tIns="0" rIns="0" bIns="0" rtlCol="0" anchor="ctr"/>
           <a:lstStyle/>
           <a:p>
-            <a:pPr algn="ctr" indent="0" marL="0">
+            <a:pPr marL="0" indent="0" algn="ctr">
               <a:buNone/>
             </a:pPr>
             <a:r>
@@ -2823,7 +2669,7 @@
           <a:bodyPr wrap="square" lIns="0" tIns="0" rIns="0" bIns="0" rtlCol="0" anchor="ctr"/>
           <a:lstStyle/>
           <a:p>
-            <a:pPr algn="ctr" indent="0" marL="0">
+            <a:pPr marL="0" indent="0" algn="ctr">
               <a:buNone/>
             </a:pPr>
             <a:r>
@@ -2882,7 +2728,7 @@
           <a:bodyPr wrap="square" rtlCol="0" anchor="t"/>
           <a:lstStyle/>
           <a:p>
-            <a:pPr algn="ctr" indent="0" marL="0">
+            <a:pPr marL="0" indent="0" algn="ctr">
               <a:buNone/>
             </a:pPr>
             <a:r>
@@ -2919,7 +2765,7 @@
           </a:solidFill>
           <a:ln/>
           <a:effectLst>
-            <a:outerShdw sx="100000" sy="100000" kx="0" ky="0" algn="bl" rotWithShape="0" blurRad="101600" dist="25400" dir="8100000">
+            <a:outerShdw blurRad="101600" dist="25400" dir="8100000" algn="bl" rotWithShape="0">
               <a:srgbClr val="000000">
                 <a:alpha val="10000"/>
               </a:srgbClr>
@@ -2968,7 +2814,7 @@
           <a:bodyPr wrap="square" lIns="0" tIns="0" rIns="0" bIns="0" rtlCol="0" anchor="ctr"/>
           <a:lstStyle/>
           <a:p>
-            <a:pPr indent="0" marL="0">
+            <a:pPr marL="0" indent="0">
               <a:buNone/>
             </a:pPr>
             <a:r>
@@ -3007,7 +2853,7 @@
           <a:bodyPr wrap="square" lIns="0" tIns="0" rIns="0" bIns="0" rtlCol="0" anchor="ctr"/>
           <a:lstStyle/>
           <a:p>
-            <a:pPr algn="ctr" indent="0" marL="0">
+            <a:pPr marL="0" indent="0" algn="ctr">
               <a:buNone/>
             </a:pPr>
             <a:r>
@@ -3046,7 +2892,7 @@
           <a:bodyPr wrap="square" lIns="0" tIns="0" rIns="0" bIns="0" rtlCol="0" anchor="ctr"/>
           <a:lstStyle/>
           <a:p>
-            <a:pPr algn="ctr" indent="0" marL="0">
+            <a:pPr marL="0" indent="0" algn="ctr">
               <a:buNone/>
             </a:pPr>
             <a:r>
@@ -3105,7 +2951,7 @@
           <a:bodyPr wrap="square" rtlCol="0" anchor="t"/>
           <a:lstStyle/>
           <a:p>
-            <a:pPr algn="ctr" indent="0" marL="0">
+            <a:pPr marL="0" indent="0" algn="ctr">
               <a:buNone/>
             </a:pPr>
             <a:r>
@@ -3142,7 +2988,7 @@
           </a:solidFill>
           <a:ln/>
           <a:effectLst>
-            <a:outerShdw sx="100000" sy="100000" kx="0" ky="0" algn="bl" rotWithShape="0" blurRad="101600" dist="25400" dir="8100000">
+            <a:outerShdw blurRad="101600" dist="25400" dir="8100000" algn="bl" rotWithShape="0">
               <a:srgbClr val="000000">
                 <a:alpha val="10000"/>
               </a:srgbClr>
@@ -3191,7 +3037,7 @@
           <a:bodyPr wrap="square" lIns="0" tIns="0" rIns="0" bIns="0" rtlCol="0" anchor="ctr"/>
           <a:lstStyle/>
           <a:p>
-            <a:pPr indent="0" marL="0">
+            <a:pPr marL="0" indent="0">
               <a:buNone/>
             </a:pPr>
             <a:r>
@@ -3230,7 +3076,7 @@
           <a:bodyPr wrap="square" lIns="0" tIns="0" rIns="0" bIns="0" rtlCol="0" anchor="ctr"/>
           <a:lstStyle/>
           <a:p>
-            <a:pPr algn="ctr" indent="0" marL="0">
+            <a:pPr marL="0" indent="0" algn="ctr">
               <a:buNone/>
             </a:pPr>
             <a:r>
@@ -3269,7 +3115,7 @@
           <a:bodyPr wrap="square" lIns="0" tIns="0" rIns="0" bIns="0" rtlCol="0" anchor="ctr"/>
           <a:lstStyle/>
           <a:p>
-            <a:pPr algn="ctr" indent="0" marL="0">
+            <a:pPr marL="0" indent="0" algn="ctr">
               <a:buNone/>
             </a:pPr>
             <a:r>
@@ -3328,7 +3174,7 @@
           <a:bodyPr wrap="square" rtlCol="0" anchor="t"/>
           <a:lstStyle/>
           <a:p>
-            <a:pPr algn="ctr" indent="0" marL="0">
+            <a:pPr marL="0" indent="0" algn="ctr">
               <a:buNone/>
             </a:pPr>
             <a:r>
@@ -3362,6 +3208,7 @@
         <a:solidFill>
           <a:srgbClr val="0D1B2A"/>
         </a:solidFill>
+        <a:effectLst/>
       </p:bgPr>
     </p:bg>
     <p:spTree>
@@ -3399,7 +3246,7 @@
           <a:bodyPr wrap="square" lIns="0" tIns="0" rIns="0" bIns="0" rtlCol="0" anchor="ctr"/>
           <a:lstStyle/>
           <a:p>
-            <a:pPr indent="0" marL="0">
+            <a:pPr marL="0" indent="0">
               <a:buNone/>
             </a:pPr>
             <a:r>
@@ -3438,7 +3285,7 @@
           <a:bodyPr wrap="square" lIns="0" tIns="0" rIns="0" bIns="0" rtlCol="0" anchor="ctr"/>
           <a:lstStyle/>
           <a:p>
-            <a:pPr indent="0" marL="0">
+            <a:pPr marL="0" indent="0">
               <a:buNone/>
             </a:pPr>
             <a:r>
@@ -3497,7 +3344,7 @@
           <a:bodyPr wrap="square" rtlCol="0" anchor="ctr"/>
           <a:lstStyle/>
           <a:p>
-            <a:pPr algn="ctr" indent="0" marL="0">
+            <a:pPr marL="0" indent="0" algn="ctr">
               <a:buNone/>
             </a:pPr>
             <a:r>
@@ -3557,7 +3404,7 @@
           </a:solidFill>
           <a:ln/>
           <a:effectLst>
-            <a:outerShdw sx="100000" sy="100000" kx="0" ky="0" algn="bl" rotWithShape="0" blurRad="101600" dist="25400" dir="8100000">
+            <a:outerShdw blurRad="101600" dist="25400" dir="8100000" algn="bl" rotWithShape="0">
               <a:srgbClr val="000000">
                 <a:alpha val="20000"/>
               </a:srgbClr>
@@ -3606,7 +3453,7 @@
           <a:bodyPr wrap="square" lIns="0" tIns="0" rIns="0" bIns="0" rtlCol="0" anchor="ctr"/>
           <a:lstStyle/>
           <a:p>
-            <a:pPr algn="ctr" indent="0" marL="0">
+            <a:pPr marL="0" indent="0" algn="ctr">
               <a:buNone/>
             </a:pPr>
             <a:r>
@@ -3645,7 +3492,7 @@
           <a:bodyPr wrap="square" rtlCol="0" anchor="t"/>
           <a:lstStyle/>
           <a:p>
-            <a:pPr algn="ctr" indent="0" marL="0">
+            <a:pPr marL="0" indent="0" algn="ctr">
               <a:buNone/>
             </a:pPr>
             <a:r>
@@ -3704,7 +3551,7 @@
           <a:bodyPr wrap="square" rtlCol="0" anchor="ctr"/>
           <a:lstStyle/>
           <a:p>
-            <a:pPr algn="ctr" indent="0" marL="0">
+            <a:pPr marL="0" indent="0" algn="ctr">
               <a:buNone/>
             </a:pPr>
             <a:r>
@@ -3764,7 +3611,7 @@
           </a:solidFill>
           <a:ln/>
           <a:effectLst>
-            <a:outerShdw sx="100000" sy="100000" kx="0" ky="0" algn="bl" rotWithShape="0" blurRad="101600" dist="25400" dir="8100000">
+            <a:outerShdw blurRad="101600" dist="25400" dir="8100000" algn="bl" rotWithShape="0">
               <a:srgbClr val="000000">
                 <a:alpha val="20000"/>
               </a:srgbClr>
@@ -3813,7 +3660,7 @@
           <a:bodyPr wrap="square" lIns="0" tIns="0" rIns="0" bIns="0" rtlCol="0" anchor="ctr"/>
           <a:lstStyle/>
           <a:p>
-            <a:pPr algn="ctr" indent="0" marL="0">
+            <a:pPr marL="0" indent="0" algn="ctr">
               <a:buNone/>
             </a:pPr>
             <a:r>
@@ -3852,7 +3699,7 @@
           <a:bodyPr wrap="square" rtlCol="0" anchor="t"/>
           <a:lstStyle/>
           <a:p>
-            <a:pPr algn="ctr" indent="0" marL="0">
+            <a:pPr marL="0" indent="0" algn="ctr">
               <a:buNone/>
             </a:pPr>
             <a:r>
@@ -3911,7 +3758,7 @@
           <a:bodyPr wrap="square" rtlCol="0" anchor="ctr"/>
           <a:lstStyle/>
           <a:p>
-            <a:pPr algn="ctr" indent="0" marL="0">
+            <a:pPr marL="0" indent="0" algn="ctr">
               <a:buNone/>
             </a:pPr>
             <a:r>
@@ -3971,7 +3818,7 @@
           </a:solidFill>
           <a:ln/>
           <a:effectLst>
-            <a:outerShdw sx="100000" sy="100000" kx="0" ky="0" algn="bl" rotWithShape="0" blurRad="101600" dist="25400" dir="8100000">
+            <a:outerShdw blurRad="101600" dist="25400" dir="8100000" algn="bl" rotWithShape="0">
               <a:srgbClr val="000000">
                 <a:alpha val="20000"/>
               </a:srgbClr>
@@ -4020,7 +3867,7 @@
           <a:bodyPr wrap="square" lIns="0" tIns="0" rIns="0" bIns="0" rtlCol="0" anchor="ctr"/>
           <a:lstStyle/>
           <a:p>
-            <a:pPr algn="ctr" indent="0" marL="0">
+            <a:pPr marL="0" indent="0" algn="ctr">
               <a:buNone/>
             </a:pPr>
             <a:r>
@@ -4059,7 +3906,7 @@
           <a:bodyPr wrap="square" rtlCol="0" anchor="t"/>
           <a:lstStyle/>
           <a:p>
-            <a:pPr algn="ctr" indent="0" marL="0">
+            <a:pPr marL="0" indent="0" algn="ctr">
               <a:buNone/>
             </a:pPr>
             <a:r>
@@ -4118,7 +3965,7 @@
           <a:bodyPr wrap="square" rtlCol="0" anchor="ctr"/>
           <a:lstStyle/>
           <a:p>
-            <a:pPr algn="ctr" indent="0" marL="0">
+            <a:pPr marL="0" indent="0" algn="ctr">
               <a:buNone/>
             </a:pPr>
             <a:r>
@@ -4178,7 +4025,7 @@
           </a:solidFill>
           <a:ln/>
           <a:effectLst>
-            <a:outerShdw sx="100000" sy="100000" kx="0" ky="0" algn="bl" rotWithShape="0" blurRad="101600" dist="25400" dir="8100000">
+            <a:outerShdw blurRad="101600" dist="25400" dir="8100000" algn="bl" rotWithShape="0">
               <a:srgbClr val="000000">
                 <a:alpha val="20000"/>
               </a:srgbClr>
@@ -4227,7 +4074,7 @@
           <a:bodyPr wrap="square" lIns="0" tIns="0" rIns="0" bIns="0" rtlCol="0" anchor="ctr"/>
           <a:lstStyle/>
           <a:p>
-            <a:pPr algn="ctr" indent="0" marL="0">
+            <a:pPr marL="0" indent="0" algn="ctr">
               <a:buNone/>
             </a:pPr>
             <a:r>
@@ -4266,7 +4113,7 @@
           <a:bodyPr wrap="square" rtlCol="0" anchor="t"/>
           <a:lstStyle/>
           <a:p>
-            <a:pPr algn="ctr" indent="0" marL="0">
+            <a:pPr marL="0" indent="0" algn="ctr">
               <a:buNone/>
             </a:pPr>
             <a:r>
@@ -4325,7 +4172,7 @@
           <a:bodyPr wrap="square" rtlCol="0" anchor="ctr"/>
           <a:lstStyle/>
           <a:p>
-            <a:pPr algn="ctr" indent="0" marL="0">
+            <a:pPr marL="0" indent="0" algn="ctr">
               <a:buNone/>
             </a:pPr>
             <a:r>
@@ -4362,7 +4209,7 @@
           </a:solidFill>
           <a:ln/>
           <a:effectLst>
-            <a:outerShdw sx="100000" sy="100000" kx="0" ky="0" algn="bl" rotWithShape="0" blurRad="101600" dist="25400" dir="8100000">
+            <a:outerShdw blurRad="101600" dist="25400" dir="8100000" algn="bl" rotWithShape="0">
               <a:srgbClr val="000000">
                 <a:alpha val="20000"/>
               </a:srgbClr>
@@ -4411,7 +4258,7 @@
           <a:bodyPr wrap="square" lIns="0" tIns="0" rIns="0" bIns="0" rtlCol="0" anchor="ctr"/>
           <a:lstStyle/>
           <a:p>
-            <a:pPr algn="ctr" indent="0" marL="0">
+            <a:pPr marL="0" indent="0" algn="ctr">
               <a:buNone/>
             </a:pPr>
             <a:r>
@@ -4450,7 +4297,7 @@
           <a:bodyPr wrap="square" rtlCol="0" anchor="t"/>
           <a:lstStyle/>
           <a:p>
-            <a:pPr algn="ctr" indent="0" marL="0">
+            <a:pPr marL="0" indent="0" algn="ctr">
               <a:buNone/>
             </a:pPr>
             <a:r>
@@ -4484,6 +4331,7 @@
         <a:solidFill>
           <a:srgbClr val="F4F7FA"/>
         </a:solidFill>
+        <a:effectLst/>
       </p:bgPr>
     </p:bg>
     <p:spTree>
@@ -4522,172 +4370,7 @@
       </p:sp>
       <p:pic>
         <p:nvPicPr>
-          <p:cNvPr id="3" name="Image 0" descr="preencoded.png">    </p:cNvPr>
-          <p:cNvPicPr>
-            <a:picLocks noChangeAspect="1"/>
-          </p:cNvPicPr>
-          <p:nvPr/>
-        </p:nvPicPr>
-        <p:blipFill>
-          <a:blip r:embed="rId1"/>
-          <a:stretch>
-            <a:fillRect/>
-          </a:stretch>
-        </p:blipFill>
-        <p:spPr>
-          <a:xfrm>
-            <a:off x="228600" y="228600"/>
-            <a:ext cx="502920" cy="502920"/>
-          </a:xfrm>
-          <a:prstGeom prst="rect">
-            <a:avLst/>
-          </a:prstGeom>
-        </p:spPr>
-      </p:pic>
-      <p:sp>
-        <p:nvSpPr>
-          <p:cNvPr id="4" name="Text 1"/>
-          <p:cNvSpPr/>
-          <p:nvPr/>
-        </p:nvSpPr>
-        <p:spPr>
-          <a:xfrm>
-            <a:off x="868680" y="164592"/>
-            <a:ext cx="7863840" cy="594360"/>
-          </a:xfrm>
-          <a:prstGeom prst="rect">
-            <a:avLst/>
-          </a:prstGeom>
-          <a:noFill/>
-          <a:ln/>
-        </p:spPr>
-        <p:txBody>
-          <a:bodyPr wrap="square" lIns="0" tIns="0" rIns="0" bIns="0" rtlCol="0" anchor="ctr"/>
-          <a:lstStyle/>
-          <a:p>
-            <a:pPr indent="0" marL="0">
-              <a:buNone/>
-            </a:pPr>
-            <a:r>
-              <a:rPr lang="en-US" sz="2800" b="1" dirty="0">
-                <a:solidFill>
-                  <a:srgbClr val="FFFFFF"/>
-                </a:solidFill>
-                <a:latin typeface="Calibri" pitchFamily="34" charset="0"/>
-                <a:ea typeface="Calibri" pitchFamily="34" charset="-122"/>
-                <a:cs typeface="Calibri" pitchFamily="34" charset="-120"/>
-              </a:rPr>
-              <a:t>Test Mühendisinin Rolü</a:t>
-            </a:r>
-            <a:endParaRPr lang="en-US" sz="2800" dirty="0"/>
-          </a:p>
-        </p:txBody>
-      </p:sp>
-      <p:sp>
-        <p:nvSpPr>
-          <p:cNvPr id="5" name="Text 2"/>
-          <p:cNvSpPr/>
-          <p:nvPr/>
-        </p:nvSpPr>
-        <p:spPr>
-          <a:xfrm>
-            <a:off x="320040" y="1097280"/>
-            <a:ext cx="4114800" cy="457200"/>
-          </a:xfrm>
-          <a:prstGeom prst="rect">
-            <a:avLst/>
-          </a:prstGeom>
-          <a:noFill/>
-          <a:ln/>
-        </p:spPr>
-        <p:txBody>
-          <a:bodyPr wrap="square" lIns="0" tIns="0" rIns="0" bIns="0" rtlCol="0" anchor="ctr"/>
-          <a:lstStyle/>
-          <a:p>
-            <a:pPr indent="0" marL="0">
-              <a:buNone/>
-            </a:pPr>
-            <a:r>
-              <a:rPr lang="en-US" sz="1700" b="1" dirty="0">
-                <a:solidFill>
-                  <a:srgbClr val="0D1B2A"/>
-                </a:solidFill>
-                <a:latin typeface="Calibri" pitchFamily="34" charset="0"/>
-                <a:ea typeface="Calibri" pitchFamily="34" charset="-122"/>
-                <a:cs typeface="Calibri" pitchFamily="34" charset="-120"/>
-              </a:rPr>
-              <a:t>Temel Sorumluluklar</a:t>
-            </a:r>
-            <a:endParaRPr lang="en-US" sz="1700" dirty="0"/>
-          </a:p>
-        </p:txBody>
-      </p:sp>
-      <p:pic>
-        <p:nvPicPr>
-          <p:cNvPr id="6" name="Image 1" descr="preencoded.png">    </p:cNvPr>
-          <p:cNvPicPr>
-            <a:picLocks noChangeAspect="1"/>
-          </p:cNvPicPr>
-          <p:nvPr/>
-        </p:nvPicPr>
-        <p:blipFill>
-          <a:blip r:embed="rId2"/>
-          <a:stretch>
-            <a:fillRect/>
-          </a:stretch>
-        </p:blipFill>
-        <p:spPr>
-          <a:xfrm>
-            <a:off x="320040" y="1682496"/>
-            <a:ext cx="320040" cy="320040"/>
-          </a:xfrm>
-          <a:prstGeom prst="rect">
-            <a:avLst/>
-          </a:prstGeom>
-        </p:spPr>
-      </p:pic>
-      <p:sp>
-        <p:nvSpPr>
-          <p:cNvPr id="7" name="Text 3"/>
-          <p:cNvSpPr/>
-          <p:nvPr/>
-        </p:nvSpPr>
-        <p:spPr>
-          <a:xfrm>
-            <a:off x="749808" y="1645920"/>
-            <a:ext cx="3566160" cy="411480"/>
-          </a:xfrm>
-          <a:prstGeom prst="rect">
-            <a:avLst/>
-          </a:prstGeom>
-          <a:noFill/>
-          <a:ln/>
-        </p:spPr>
-        <p:txBody>
-          <a:bodyPr wrap="square" lIns="0" tIns="0" rIns="0" bIns="0" rtlCol="0" anchor="ctr"/>
-          <a:lstStyle/>
-          <a:p>
-            <a:pPr indent="0" marL="0">
-              <a:buNone/>
-            </a:pPr>
-            <a:r>
-              <a:rPr lang="en-US" sz="1300" dirty="0">
-                <a:solidFill>
-                  <a:srgbClr val="1E293B"/>
-                </a:solidFill>
-                <a:latin typeface="Calibri" pitchFamily="34" charset="0"/>
-                <a:ea typeface="Calibri" pitchFamily="34" charset="-122"/>
-                <a:cs typeface="Calibri" pitchFamily="34" charset="-120"/>
-              </a:rPr>
-              <a:t>Test planı ve strateji hazırlamak</a:t>
-            </a:r>
-            <a:endParaRPr lang="en-US" sz="1300" dirty="0"/>
-          </a:p>
-        </p:txBody>
-      </p:sp>
-      <p:pic>
-        <p:nvPicPr>
-          <p:cNvPr id="8" name="Image 2" descr="preencoded.png">    </p:cNvPr>
+          <p:cNvPr id="3" name="Image 0" descr="preencoded.png"/>
           <p:cNvPicPr>
             <a:picLocks noChangeAspect="1"/>
           </p:cNvPicPr>
@@ -4701,8 +4384,8 @@
         </p:blipFill>
         <p:spPr>
           <a:xfrm>
-            <a:off x="320040" y="2185416"/>
-            <a:ext cx="320040" cy="320040"/>
+            <a:off x="228600" y="228600"/>
+            <a:ext cx="502920" cy="502920"/>
           </a:xfrm>
           <a:prstGeom prst="rect">
             <a:avLst/>
@@ -4711,14 +4394,14 @@
       </p:pic>
       <p:sp>
         <p:nvSpPr>
-          <p:cNvPr id="9" name="Text 4"/>
-          <p:cNvSpPr/>
-          <p:nvPr/>
-        </p:nvSpPr>
-        <p:spPr>
-          <a:xfrm>
-            <a:off x="749808" y="2148840"/>
-            <a:ext cx="3566160" cy="411480"/>
+          <p:cNvPr id="4" name="Text 1"/>
+          <p:cNvSpPr/>
+          <p:nvPr/>
+        </p:nvSpPr>
+        <p:spPr>
+          <a:xfrm>
+            <a:off x="868680" y="164592"/>
+            <a:ext cx="7863840" cy="594360"/>
           </a:xfrm>
           <a:prstGeom prst="rect">
             <a:avLst/>
@@ -4730,27 +4413,66 @@
           <a:bodyPr wrap="square" lIns="0" tIns="0" rIns="0" bIns="0" rtlCol="0" anchor="ctr"/>
           <a:lstStyle/>
           <a:p>
-            <a:pPr indent="0" marL="0">
-              <a:buNone/>
-            </a:pPr>
-            <a:r>
-              <a:rPr lang="en-US" sz="1300" dirty="0">
-                <a:solidFill>
-                  <a:srgbClr val="1E293B"/>
-                </a:solidFill>
-                <a:latin typeface="Calibri" pitchFamily="34" charset="0"/>
-                <a:ea typeface="Calibri" pitchFamily="34" charset="-122"/>
-                <a:cs typeface="Calibri" pitchFamily="34" charset="-120"/>
-              </a:rPr>
-              <a:t>Test senaryoları ve test durumları oluşturmak</a:t>
-            </a:r>
-            <a:endParaRPr lang="en-US" sz="1300" dirty="0"/>
+            <a:pPr marL="0" indent="0">
+              <a:buNone/>
+            </a:pPr>
+            <a:r>
+              <a:rPr lang="en-US" sz="2800" b="1" dirty="0">
+                <a:solidFill>
+                  <a:srgbClr val="FFFFFF"/>
+                </a:solidFill>
+                <a:latin typeface="Calibri" pitchFamily="34" charset="0"/>
+                <a:ea typeface="Calibri" pitchFamily="34" charset="-122"/>
+                <a:cs typeface="Calibri" pitchFamily="34" charset="-120"/>
+              </a:rPr>
+              <a:t>Test Mühendisinin Rolü</a:t>
+            </a:r>
+            <a:endParaRPr lang="en-US" sz="2800" dirty="0"/>
+          </a:p>
+        </p:txBody>
+      </p:sp>
+      <p:sp>
+        <p:nvSpPr>
+          <p:cNvPr id="5" name="Text 2"/>
+          <p:cNvSpPr/>
+          <p:nvPr/>
+        </p:nvSpPr>
+        <p:spPr>
+          <a:xfrm>
+            <a:off x="320040" y="1097280"/>
+            <a:ext cx="4114800" cy="457200"/>
+          </a:xfrm>
+          <a:prstGeom prst="rect">
+            <a:avLst/>
+          </a:prstGeom>
+          <a:noFill/>
+          <a:ln/>
+        </p:spPr>
+        <p:txBody>
+          <a:bodyPr wrap="square" lIns="0" tIns="0" rIns="0" bIns="0" rtlCol="0" anchor="ctr"/>
+          <a:lstStyle/>
+          <a:p>
+            <a:pPr marL="0" indent="0">
+              <a:buNone/>
+            </a:pPr>
+            <a:r>
+              <a:rPr lang="en-US" sz="1700" b="1" dirty="0">
+                <a:solidFill>
+                  <a:srgbClr val="0D1B2A"/>
+                </a:solidFill>
+                <a:latin typeface="Calibri" pitchFamily="34" charset="0"/>
+                <a:ea typeface="Calibri" pitchFamily="34" charset="-122"/>
+                <a:cs typeface="Calibri" pitchFamily="34" charset="-120"/>
+              </a:rPr>
+              <a:t>Temel Sorumluluklar</a:t>
+            </a:r>
+            <a:endParaRPr lang="en-US" sz="1700" dirty="0"/>
           </a:p>
         </p:txBody>
       </p:sp>
       <p:pic>
         <p:nvPicPr>
-          <p:cNvPr id="10" name="Image 3" descr="preencoded.png">    </p:cNvPr>
+          <p:cNvPr id="6" name="Image 1" descr="preencoded.png"/>
           <p:cNvPicPr>
             <a:picLocks noChangeAspect="1"/>
           </p:cNvPicPr>
@@ -4764,7 +4486,7 @@
         </p:blipFill>
         <p:spPr>
           <a:xfrm>
-            <a:off x="320040" y="2688336"/>
+            <a:off x="320040" y="1682496"/>
             <a:ext cx="320040" cy="320040"/>
           </a:xfrm>
           <a:prstGeom prst="rect">
@@ -4774,13 +4496,13 @@
       </p:pic>
       <p:sp>
         <p:nvSpPr>
-          <p:cNvPr id="11" name="Text 5"/>
-          <p:cNvSpPr/>
-          <p:nvPr/>
-        </p:nvSpPr>
-        <p:spPr>
-          <a:xfrm>
-            <a:off x="749808" y="2651760"/>
+          <p:cNvPr id="7" name="Text 3"/>
+          <p:cNvSpPr/>
+          <p:nvPr/>
+        </p:nvSpPr>
+        <p:spPr>
+          <a:xfrm>
+            <a:off x="749808" y="1645920"/>
             <a:ext cx="3566160" cy="411480"/>
           </a:xfrm>
           <a:prstGeom prst="rect">
@@ -4793,7 +4515,7 @@
           <a:bodyPr wrap="square" lIns="0" tIns="0" rIns="0" bIns="0" rtlCol="0" anchor="ctr"/>
           <a:lstStyle/>
           <a:p>
-            <a:pPr indent="0" marL="0">
+            <a:pPr marL="0" indent="0">
               <a:buNone/>
             </a:pPr>
             <a:r>
@@ -4805,7 +4527,7 @@
                 <a:ea typeface="Calibri" pitchFamily="34" charset="-122"/>
                 <a:cs typeface="Calibri" pitchFamily="34" charset="-120"/>
               </a:rPr>
-              <a:t>Manuel ve otomatik testleri çalıştırmak</a:t>
+              <a:t>Test planı ve strateji hazırlamak</a:t>
             </a:r>
             <a:endParaRPr lang="en-US" sz="1300" dirty="0"/>
           </a:p>
@@ -4813,21 +4535,21 @@
       </p:sp>
       <p:pic>
         <p:nvPicPr>
-          <p:cNvPr id="12" name="Image 4" descr="preencoded.png">    </p:cNvPr>
+          <p:cNvPr id="8" name="Image 2" descr="preencoded.png"/>
           <p:cNvPicPr>
             <a:picLocks noChangeAspect="1"/>
           </p:cNvPicPr>
           <p:nvPr/>
         </p:nvPicPr>
         <p:blipFill>
-          <a:blip r:embed="rId5"/>
+          <a:blip r:embed="rId4"/>
           <a:stretch>
             <a:fillRect/>
           </a:stretch>
         </p:blipFill>
         <p:spPr>
           <a:xfrm>
-            <a:off x="320040" y="3191256"/>
+            <a:off x="320040" y="2185416"/>
             <a:ext cx="320040" cy="320040"/>
           </a:xfrm>
           <a:prstGeom prst="rect">
@@ -4837,13 +4559,13 @@
       </p:pic>
       <p:sp>
         <p:nvSpPr>
-          <p:cNvPr id="13" name="Text 6"/>
-          <p:cNvSpPr/>
-          <p:nvPr/>
-        </p:nvSpPr>
-        <p:spPr>
-          <a:xfrm>
-            <a:off x="749808" y="3154680"/>
+          <p:cNvPr id="9" name="Text 4"/>
+          <p:cNvSpPr/>
+          <p:nvPr/>
+        </p:nvSpPr>
+        <p:spPr>
+          <a:xfrm>
+            <a:off x="749808" y="2148840"/>
             <a:ext cx="3566160" cy="411480"/>
           </a:xfrm>
           <a:prstGeom prst="rect">
@@ -4856,7 +4578,7 @@
           <a:bodyPr wrap="square" lIns="0" tIns="0" rIns="0" bIns="0" rtlCol="0" anchor="ctr"/>
           <a:lstStyle/>
           <a:p>
-            <a:pPr indent="0" marL="0">
+            <a:pPr marL="0" indent="0">
               <a:buNone/>
             </a:pPr>
             <a:r>
@@ -4868,7 +4590,7 @@
                 <a:ea typeface="Calibri" pitchFamily="34" charset="-122"/>
                 <a:cs typeface="Calibri" pitchFamily="34" charset="-120"/>
               </a:rPr>
-              <a:t>Hataları (bug) raporlamak ve takip etmek</a:t>
+              <a:t>Test senaryoları ve test durumları oluşturmak</a:t>
             </a:r>
             <a:endParaRPr lang="en-US" sz="1300" dirty="0"/>
           </a:p>
@@ -4876,21 +4598,21 @@
       </p:sp>
       <p:pic>
         <p:nvPicPr>
-          <p:cNvPr id="14" name="Image 5" descr="preencoded.png">    </p:cNvPr>
+          <p:cNvPr id="10" name="Image 3" descr="preencoded.png"/>
           <p:cNvPicPr>
             <a:picLocks noChangeAspect="1"/>
           </p:cNvPicPr>
           <p:nvPr/>
         </p:nvPicPr>
         <p:blipFill>
-          <a:blip r:embed="rId6"/>
+          <a:blip r:embed="rId4"/>
           <a:stretch>
             <a:fillRect/>
           </a:stretch>
         </p:blipFill>
         <p:spPr>
           <a:xfrm>
-            <a:off x="320040" y="3694176"/>
+            <a:off x="320040" y="2688336"/>
             <a:ext cx="320040" cy="320040"/>
           </a:xfrm>
           <a:prstGeom prst="rect">
@@ -4900,13 +4622,13 @@
       </p:pic>
       <p:sp>
         <p:nvSpPr>
-          <p:cNvPr id="15" name="Text 7"/>
-          <p:cNvSpPr/>
-          <p:nvPr/>
-        </p:nvSpPr>
-        <p:spPr>
-          <a:xfrm>
-            <a:off x="749808" y="3657600"/>
+          <p:cNvPr id="11" name="Text 5"/>
+          <p:cNvSpPr/>
+          <p:nvPr/>
+        </p:nvSpPr>
+        <p:spPr>
+          <a:xfrm>
+            <a:off x="749808" y="2651760"/>
             <a:ext cx="3566160" cy="411480"/>
           </a:xfrm>
           <a:prstGeom prst="rect">
@@ -4919,7 +4641,7 @@
           <a:bodyPr wrap="square" lIns="0" tIns="0" rIns="0" bIns="0" rtlCol="0" anchor="ctr"/>
           <a:lstStyle/>
           <a:p>
-            <a:pPr indent="0" marL="0">
+            <a:pPr marL="0" indent="0">
               <a:buNone/>
             </a:pPr>
             <a:r>
@@ -4931,7 +4653,7 @@
                 <a:ea typeface="Calibri" pitchFamily="34" charset="-122"/>
                 <a:cs typeface="Calibri" pitchFamily="34" charset="-120"/>
               </a:rPr>
-              <a:t>Yazılım geliştirme ekibiyle koordineli çalışmak</a:t>
+              <a:t>Manuel ve otomatik testleri çalıştırmak</a:t>
             </a:r>
             <a:endParaRPr lang="en-US" sz="1300" dirty="0"/>
           </a:p>
@@ -4939,20 +4661,146 @@
       </p:sp>
       <p:pic>
         <p:nvPicPr>
-          <p:cNvPr id="16" name="Image 6" descr="preencoded.png">    </p:cNvPr>
+          <p:cNvPr id="12" name="Image 4" descr="preencoded.png"/>
           <p:cNvPicPr>
             <a:picLocks noChangeAspect="1"/>
           </p:cNvPicPr>
           <p:nvPr/>
         </p:nvPicPr>
         <p:blipFill>
-          <a:blip r:embed="rId7"/>
+          <a:blip r:embed="rId4"/>
           <a:stretch>
             <a:fillRect/>
           </a:stretch>
         </p:blipFill>
         <p:spPr>
           <a:xfrm>
+            <a:off x="320040" y="3191256"/>
+            <a:ext cx="320040" cy="320040"/>
+          </a:xfrm>
+          <a:prstGeom prst="rect">
+            <a:avLst/>
+          </a:prstGeom>
+        </p:spPr>
+      </p:pic>
+      <p:sp>
+        <p:nvSpPr>
+          <p:cNvPr id="13" name="Text 6"/>
+          <p:cNvSpPr/>
+          <p:nvPr/>
+        </p:nvSpPr>
+        <p:spPr>
+          <a:xfrm>
+            <a:off x="749808" y="3154680"/>
+            <a:ext cx="3566160" cy="411480"/>
+          </a:xfrm>
+          <a:prstGeom prst="rect">
+            <a:avLst/>
+          </a:prstGeom>
+          <a:noFill/>
+          <a:ln/>
+        </p:spPr>
+        <p:txBody>
+          <a:bodyPr wrap="square" lIns="0" tIns="0" rIns="0" bIns="0" rtlCol="0" anchor="ctr"/>
+          <a:lstStyle/>
+          <a:p>
+            <a:pPr marL="0" indent="0">
+              <a:buNone/>
+            </a:pPr>
+            <a:r>
+              <a:rPr lang="en-US" sz="1300" dirty="0">
+                <a:solidFill>
+                  <a:srgbClr val="1E293B"/>
+                </a:solidFill>
+                <a:latin typeface="Calibri" pitchFamily="34" charset="0"/>
+                <a:ea typeface="Calibri" pitchFamily="34" charset="-122"/>
+                <a:cs typeface="Calibri" pitchFamily="34" charset="-120"/>
+              </a:rPr>
+              <a:t>Hataları (bug) raporlamak ve takip etmek</a:t>
+            </a:r>
+            <a:endParaRPr lang="en-US" sz="1300" dirty="0"/>
+          </a:p>
+        </p:txBody>
+      </p:sp>
+      <p:pic>
+        <p:nvPicPr>
+          <p:cNvPr id="14" name="Image 5" descr="preencoded.png"/>
+          <p:cNvPicPr>
+            <a:picLocks noChangeAspect="1"/>
+          </p:cNvPicPr>
+          <p:nvPr/>
+        </p:nvPicPr>
+        <p:blipFill>
+          <a:blip r:embed="rId4"/>
+          <a:stretch>
+            <a:fillRect/>
+          </a:stretch>
+        </p:blipFill>
+        <p:spPr>
+          <a:xfrm>
+            <a:off x="320040" y="3694176"/>
+            <a:ext cx="320040" cy="320040"/>
+          </a:xfrm>
+          <a:prstGeom prst="rect">
+            <a:avLst/>
+          </a:prstGeom>
+        </p:spPr>
+      </p:pic>
+      <p:sp>
+        <p:nvSpPr>
+          <p:cNvPr id="15" name="Text 7"/>
+          <p:cNvSpPr/>
+          <p:nvPr/>
+        </p:nvSpPr>
+        <p:spPr>
+          <a:xfrm>
+            <a:off x="749808" y="3657600"/>
+            <a:ext cx="3566160" cy="411480"/>
+          </a:xfrm>
+          <a:prstGeom prst="rect">
+            <a:avLst/>
+          </a:prstGeom>
+          <a:noFill/>
+          <a:ln/>
+        </p:spPr>
+        <p:txBody>
+          <a:bodyPr wrap="square" lIns="0" tIns="0" rIns="0" bIns="0" rtlCol="0" anchor="ctr"/>
+          <a:lstStyle/>
+          <a:p>
+            <a:pPr marL="0" indent="0">
+              <a:buNone/>
+            </a:pPr>
+            <a:r>
+              <a:rPr lang="en-US" sz="1300" dirty="0">
+                <a:solidFill>
+                  <a:srgbClr val="1E293B"/>
+                </a:solidFill>
+                <a:latin typeface="Calibri" pitchFamily="34" charset="0"/>
+                <a:ea typeface="Calibri" pitchFamily="34" charset="-122"/>
+                <a:cs typeface="Calibri" pitchFamily="34" charset="-120"/>
+              </a:rPr>
+              <a:t>Yazılım geliştirme ekibiyle koordineli çalışmak</a:t>
+            </a:r>
+            <a:endParaRPr lang="en-US" sz="1300" dirty="0"/>
+          </a:p>
+        </p:txBody>
+      </p:sp>
+      <p:pic>
+        <p:nvPicPr>
+          <p:cNvPr id="16" name="Image 6" descr="preencoded.png"/>
+          <p:cNvPicPr>
+            <a:picLocks noChangeAspect="1"/>
+          </p:cNvPicPr>
+          <p:nvPr/>
+        </p:nvPicPr>
+        <p:blipFill>
+          <a:blip r:embed="rId4"/>
+          <a:stretch>
+            <a:fillRect/>
+          </a:stretch>
+        </p:blipFill>
+        <p:spPr>
+          <a:xfrm>
             <a:off x="320040" y="4197096"/>
             <a:ext cx="320040" cy="320040"/>
           </a:xfrm>
@@ -4982,7 +4830,7 @@
           <a:bodyPr wrap="square" lIns="0" tIns="0" rIns="0" bIns="0" rtlCol="0" anchor="ctr"/>
           <a:lstStyle/>
           <a:p>
-            <a:pPr indent="0" marL="0">
+            <a:pPr marL="0" indent="0">
               <a:buNone/>
             </a:pPr>
             <a:r>
@@ -5019,7 +4867,7 @@
           </a:solidFill>
           <a:ln/>
           <a:effectLst>
-            <a:outerShdw sx="100000" sy="100000" kx="0" ky="0" algn="bl" rotWithShape="0" blurRad="101600" dist="25400" dir="8100000">
+            <a:outerShdw blurRad="101600" dist="25400" dir="8100000" algn="bl" rotWithShape="0">
               <a:srgbClr val="000000">
                 <a:alpha val="15000"/>
               </a:srgbClr>
@@ -5048,7 +4896,7 @@
           <a:bodyPr wrap="square" lIns="0" tIns="0" rIns="0" bIns="0" rtlCol="0" anchor="ctr"/>
           <a:lstStyle/>
           <a:p>
-            <a:pPr algn="ctr" indent="0" marL="0">
+            <a:pPr marL="0" indent="0" algn="ctr">
               <a:buNone/>
             </a:pPr>
             <a:r>
@@ -5087,7 +4935,7 @@
           <a:bodyPr wrap="square" rtlCol="0" anchor="ctr"/>
           <a:lstStyle/>
           <a:p>
-            <a:pPr algn="ctr" indent="0" marL="0">
+            <a:pPr marL="0" indent="0" algn="ctr">
               <a:buNone/>
             </a:pPr>
             <a:r>
@@ -5124,7 +4972,7 @@
           </a:solidFill>
           <a:ln/>
           <a:effectLst>
-            <a:outerShdw sx="100000" sy="100000" kx="0" ky="0" algn="bl" rotWithShape="0" blurRad="101600" dist="25400" dir="8100000">
+            <a:outerShdw blurRad="101600" dist="25400" dir="8100000" algn="bl" rotWithShape="0">
               <a:srgbClr val="000000">
                 <a:alpha val="15000"/>
               </a:srgbClr>
@@ -5153,7 +5001,7 @@
           <a:bodyPr wrap="square" lIns="0" tIns="0" rIns="0" bIns="0" rtlCol="0" anchor="ctr"/>
           <a:lstStyle/>
           <a:p>
-            <a:pPr algn="ctr" indent="0" marL="0">
+            <a:pPr marL="0" indent="0" algn="ctr">
               <a:buNone/>
             </a:pPr>
             <a:r>
@@ -5192,7 +5040,7 @@
           <a:bodyPr wrap="square" rtlCol="0" anchor="ctr"/>
           <a:lstStyle/>
           <a:p>
-            <a:pPr algn="ctr" indent="0" marL="0">
+            <a:pPr marL="0" indent="0" algn="ctr">
               <a:buNone/>
             </a:pPr>
             <a:r>
@@ -5226,6 +5074,7 @@
         <a:solidFill>
           <a:srgbClr val="F4F7FA"/>
         </a:solidFill>
+        <a:effectLst/>
       </p:bgPr>
     </p:bg>
     <p:spTree>
@@ -5264,14 +5113,14 @@
       </p:sp>
       <p:pic>
         <p:nvPicPr>
-          <p:cNvPr id="3" name="Image 0" descr="preencoded.png">    </p:cNvPr>
+          <p:cNvPr id="3" name="Image 0" descr="preencoded.png"/>
           <p:cNvPicPr>
             <a:picLocks noChangeAspect="1"/>
           </p:cNvPicPr>
           <p:nvPr/>
         </p:nvPicPr>
         <p:blipFill>
-          <a:blip r:embed="rId1"/>
+          <a:blip r:embed="rId3"/>
           <a:stretch>
             <a:fillRect/>
           </a:stretch>
@@ -5307,7 +5156,7 @@
           <a:bodyPr wrap="square" lIns="0" tIns="0" rIns="0" bIns="0" rtlCol="0" anchor="ctr"/>
           <a:lstStyle/>
           <a:p>
-            <a:pPr indent="0" marL="0">
+            <a:pPr marL="0" indent="0">
               <a:buNone/>
             </a:pPr>
             <a:r>
@@ -5344,7 +5193,7 @@
           </a:solidFill>
           <a:ln/>
           <a:effectLst>
-            <a:outerShdw sx="100000" sy="100000" kx="0" ky="0" algn="bl" rotWithShape="0" blurRad="101600" dist="25400" dir="8100000">
+            <a:outerShdw blurRad="101600" dist="25400" dir="8100000" algn="bl" rotWithShape="0">
               <a:srgbClr val="000000">
                 <a:alpha val="10000"/>
               </a:srgbClr>
@@ -5393,7 +5242,7 @@
           <a:bodyPr wrap="square" lIns="0" tIns="0" rIns="0" bIns="0" rtlCol="0" anchor="ctr"/>
           <a:lstStyle/>
           <a:p>
-            <a:pPr indent="0" marL="0">
+            <a:pPr marL="0" indent="0">
               <a:buNone/>
             </a:pPr>
             <a:r>
@@ -5452,7 +5301,7 @@
           <a:bodyPr wrap="square" rtlCol="0" anchor="ctr"/>
           <a:lstStyle/>
           <a:p>
-            <a:pPr algn="ctr" indent="0" marL="0">
+            <a:pPr marL="0" indent="0" algn="ctr">
               <a:buNone/>
             </a:pPr>
             <a:r>
@@ -5511,7 +5360,7 @@
           <a:bodyPr wrap="square" rtlCol="0" anchor="ctr"/>
           <a:lstStyle/>
           <a:p>
-            <a:pPr algn="ctr" indent="0" marL="0">
+            <a:pPr marL="0" indent="0" algn="ctr">
               <a:buNone/>
             </a:pPr>
             <a:r>
@@ -5570,7 +5419,7 @@
           <a:bodyPr wrap="square" rtlCol="0" anchor="ctr"/>
           <a:lstStyle/>
           <a:p>
-            <a:pPr algn="ctr" indent="0" marL="0">
+            <a:pPr marL="0" indent="0" algn="ctr">
               <a:buNone/>
             </a:pPr>
             <a:r>
@@ -5607,7 +5456,7 @@
           </a:solidFill>
           <a:ln/>
           <a:effectLst>
-            <a:outerShdw sx="100000" sy="100000" kx="0" ky="0" algn="bl" rotWithShape="0" blurRad="101600" dist="25400" dir="8100000">
+            <a:outerShdw blurRad="101600" dist="25400" dir="8100000" algn="bl" rotWithShape="0">
               <a:srgbClr val="000000">
                 <a:alpha val="10000"/>
               </a:srgbClr>
@@ -5656,7 +5505,7 @@
           <a:bodyPr wrap="square" lIns="0" tIns="0" rIns="0" bIns="0" rtlCol="0" anchor="ctr"/>
           <a:lstStyle/>
           <a:p>
-            <a:pPr indent="0" marL="0">
+            <a:pPr marL="0" indent="0">
               <a:buNone/>
             </a:pPr>
             <a:r>
@@ -5715,7 +5564,7 @@
           <a:bodyPr wrap="square" rtlCol="0" anchor="ctr"/>
           <a:lstStyle/>
           <a:p>
-            <a:pPr algn="ctr" indent="0" marL="0">
+            <a:pPr marL="0" indent="0" algn="ctr">
               <a:buNone/>
             </a:pPr>
             <a:r>
@@ -5774,7 +5623,7 @@
           <a:bodyPr wrap="square" rtlCol="0" anchor="ctr"/>
           <a:lstStyle/>
           <a:p>
-            <a:pPr algn="ctr" indent="0" marL="0">
+            <a:pPr marL="0" indent="0" algn="ctr">
               <a:buNone/>
             </a:pPr>
             <a:r>
@@ -5833,7 +5682,7 @@
           <a:bodyPr wrap="square" rtlCol="0" anchor="ctr"/>
           <a:lstStyle/>
           <a:p>
-            <a:pPr algn="ctr" indent="0" marL="0">
+            <a:pPr marL="0" indent="0" algn="ctr">
               <a:buNone/>
             </a:pPr>
             <a:r>
@@ -5870,7 +5719,7 @@
           </a:solidFill>
           <a:ln/>
           <a:effectLst>
-            <a:outerShdw sx="100000" sy="100000" kx="0" ky="0" algn="bl" rotWithShape="0" blurRad="101600" dist="25400" dir="8100000">
+            <a:outerShdw blurRad="101600" dist="25400" dir="8100000" algn="bl" rotWithShape="0">
               <a:srgbClr val="000000">
                 <a:alpha val="10000"/>
               </a:srgbClr>
@@ -5919,7 +5768,7 @@
           <a:bodyPr wrap="square" lIns="0" tIns="0" rIns="0" bIns="0" rtlCol="0" anchor="ctr"/>
           <a:lstStyle/>
           <a:p>
-            <a:pPr indent="0" marL="0">
+            <a:pPr marL="0" indent="0">
               <a:buNone/>
             </a:pPr>
             <a:r>
@@ -5978,7 +5827,7 @@
           <a:bodyPr wrap="square" rtlCol="0" anchor="ctr"/>
           <a:lstStyle/>
           <a:p>
-            <a:pPr algn="ctr" indent="0" marL="0">
+            <a:pPr marL="0" indent="0" algn="ctr">
               <a:buNone/>
             </a:pPr>
             <a:r>
@@ -6037,7 +5886,7 @@
           <a:bodyPr wrap="square" rtlCol="0" anchor="ctr"/>
           <a:lstStyle/>
           <a:p>
-            <a:pPr algn="ctr" indent="0" marL="0">
+            <a:pPr marL="0" indent="0" algn="ctr">
               <a:buNone/>
             </a:pPr>
             <a:r>
@@ -6096,7 +5945,7 @@
           <a:bodyPr wrap="square" rtlCol="0" anchor="ctr"/>
           <a:lstStyle/>
           <a:p>
-            <a:pPr algn="ctr" indent="0" marL="0">
+            <a:pPr marL="0" indent="0" algn="ctr">
               <a:buNone/>
             </a:pPr>
             <a:r>
@@ -6133,7 +5982,7 @@
           </a:solidFill>
           <a:ln/>
           <a:effectLst>
-            <a:outerShdw sx="100000" sy="100000" kx="0" ky="0" algn="bl" rotWithShape="0" blurRad="101600" dist="25400" dir="8100000">
+            <a:outerShdw blurRad="101600" dist="25400" dir="8100000" algn="bl" rotWithShape="0">
               <a:srgbClr val="000000">
                 <a:alpha val="10000"/>
               </a:srgbClr>
@@ -6182,7 +6031,7 @@
           <a:bodyPr wrap="square" lIns="0" tIns="0" rIns="0" bIns="0" rtlCol="0" anchor="ctr"/>
           <a:lstStyle/>
           <a:p>
-            <a:pPr indent="0" marL="0">
+            <a:pPr marL="0" indent="0">
               <a:buNone/>
             </a:pPr>
             <a:r>
@@ -6241,7 +6090,7 @@
           <a:bodyPr wrap="square" rtlCol="0" anchor="ctr"/>
           <a:lstStyle/>
           <a:p>
-            <a:pPr algn="ctr" indent="0" marL="0">
+            <a:pPr marL="0" indent="0" algn="ctr">
               <a:buNone/>
             </a:pPr>
             <a:r>
@@ -6300,7 +6149,7 @@
           <a:bodyPr wrap="square" rtlCol="0" anchor="ctr"/>
           <a:lstStyle/>
           <a:p>
-            <a:pPr algn="ctr" indent="0" marL="0">
+            <a:pPr marL="0" indent="0" algn="ctr">
               <a:buNone/>
             </a:pPr>
             <a:r>
@@ -6359,7 +6208,7 @@
           <a:bodyPr wrap="square" rtlCol="0" anchor="ctr"/>
           <a:lstStyle/>
           <a:p>
-            <a:pPr algn="ctr" indent="0" marL="0">
+            <a:pPr marL="0" indent="0" algn="ctr">
               <a:buNone/>
             </a:pPr>
             <a:r>
@@ -6393,6 +6242,7 @@
         <a:solidFill>
           <a:srgbClr val="0D1B2A"/>
         </a:solidFill>
+        <a:effectLst/>
       </p:bgPr>
     </p:bg>
     <p:spTree>
@@ -6431,14 +6281,14 @@
       </p:sp>
       <p:pic>
         <p:nvPicPr>
-          <p:cNvPr id="3" name="Image 0" descr="preencoded.png">    </p:cNvPr>
+          <p:cNvPr id="3" name="Image 0" descr="preencoded.png"/>
           <p:cNvPicPr>
             <a:picLocks noChangeAspect="1"/>
           </p:cNvPicPr>
           <p:nvPr/>
         </p:nvPicPr>
         <p:blipFill>
-          <a:blip r:embed="rId1"/>
+          <a:blip r:embed="rId3"/>
           <a:stretch>
             <a:fillRect/>
           </a:stretch>
@@ -6474,7 +6324,7 @@
           <a:bodyPr wrap="square" lIns="0" tIns="0" rIns="0" bIns="0" rtlCol="0" anchor="ctr"/>
           <a:lstStyle/>
           <a:p>
-            <a:pPr indent="0" marL="0">
+            <a:pPr marL="0" indent="0">
               <a:buNone/>
             </a:pPr>
             <a:r>
@@ -6513,7 +6363,7 @@
           <a:bodyPr wrap="square" lIns="0" tIns="0" rIns="0" bIns="0" rtlCol="0" anchor="ctr"/>
           <a:lstStyle/>
           <a:p>
-            <a:pPr indent="0" marL="0">
+            <a:pPr marL="0" indent="0">
               <a:buNone/>
             </a:pPr>
             <a:r>
@@ -6552,7 +6402,7 @@
           <a:bodyPr wrap="square" lIns="0" tIns="0" rIns="0" bIns="0" rtlCol="0" anchor="ctr"/>
           <a:lstStyle/>
           <a:p>
-            <a:pPr indent="0" marL="0">
+            <a:pPr marL="0" indent="0">
               <a:buNone/>
             </a:pPr>
             <a:r>
@@ -6569,7 +6419,7 @@
             <a:endParaRPr lang="en-US" sz="1400" dirty="0"/>
           </a:p>
           <a:p>
-            <a:pPr indent="0" marL="0">
+            <a:pPr marL="0" indent="0">
               <a:buNone/>
             </a:pPr>
             <a:r>
@@ -6628,7 +6478,7 @@
           <a:bodyPr wrap="square" lIns="0" tIns="0" rIns="0" bIns="0" rtlCol="0" anchor="ctr"/>
           <a:lstStyle/>
           <a:p>
-            <a:pPr indent="0" marL="0">
+            <a:pPr marL="0" indent="0">
               <a:buNone/>
             </a:pPr>
             <a:r>
@@ -6687,7 +6537,7 @@
           <a:bodyPr wrap="square" lIns="0" tIns="0" rIns="0" bIns="0" rtlCol="0" anchor="ctr"/>
           <a:lstStyle/>
           <a:p>
-            <a:pPr indent="0" marL="0">
+            <a:pPr marL="0" indent="0">
               <a:buNone/>
             </a:pPr>
             <a:r>
@@ -6746,7 +6596,7 @@
           <a:bodyPr wrap="square" lIns="0" tIns="0" rIns="0" bIns="0" rtlCol="0" anchor="ctr"/>
           <a:lstStyle/>
           <a:p>
-            <a:pPr indent="0" marL="0">
+            <a:pPr marL="0" indent="0">
               <a:buNone/>
             </a:pPr>
             <a:r>
@@ -6765,6 +6615,507 @@
         </p:txBody>
       </p:sp>
     </p:spTree>
+  </p:cSld>
+  <p:clrMapOvr>
+    <a:masterClrMapping/>
+  </p:clrMapOvr>
+</p:sld>
+</file>
+
+<file path=ppt/slides/slide8.xml><?xml version="1.0" encoding="utf-8"?>
+<p:sld xmlns:a="http://schemas.openxmlformats.org/drawingml/2006/main" xmlns:r="http://schemas.openxmlformats.org/officeDocument/2006/relationships" xmlns:p="http://schemas.openxmlformats.org/presentationml/2006/main">
+  <p:cSld>
+    <p:bg>
+      <p:bgPr>
+        <a:solidFill>
+          <a:srgbClr val="0D1B2A"/>
+        </a:solidFill>
+        <a:effectLst/>
+      </p:bgPr>
+    </p:bg>
+    <p:spTree>
+      <p:nvGrpSpPr>
+        <p:cNvPr id="1" name=""/>
+        <p:cNvGrpSpPr/>
+        <p:nvPr/>
+      </p:nvGrpSpPr>
+      <p:grpSpPr>
+        <a:xfrm>
+          <a:off x="0" y="0"/>
+          <a:ext cx="0" cy="0"/>
+          <a:chOff x="0" y="0"/>
+          <a:chExt cx="0" cy="0"/>
+        </a:xfrm>
+      </p:grpSpPr>
+      <p:sp>
+        <p:nvSpPr>
+          <p:cNvPr id="2" name="Shape 0"/>
+          <p:cNvSpPr/>
+          <p:nvPr/>
+        </p:nvSpPr>
+        <p:spPr>
+          <a:xfrm>
+            <a:off x="0" y="0"/>
+            <a:ext cx="201168" cy="5143500"/>
+          </a:xfrm>
+          <a:prstGeom prst="rect">
+            <a:avLst/>
+          </a:prstGeom>
+          <a:solidFill>
+            <a:srgbClr val="02C39A"/>
+          </a:solidFill>
+          <a:ln/>
+        </p:spPr>
+      </p:sp>
+      <p:sp>
+        <p:nvSpPr>
+          <p:cNvPr id="4" name="Text 1"/>
+          <p:cNvSpPr/>
+          <p:nvPr/>
+        </p:nvSpPr>
+        <p:spPr>
+          <a:xfrm>
+            <a:off x="502920" y="914400"/>
+            <a:ext cx="5943600" cy="777240"/>
+          </a:xfrm>
+          <a:prstGeom prst="rect">
+            <a:avLst/>
+          </a:prstGeom>
+          <a:noFill/>
+          <a:ln/>
+        </p:spPr>
+        <p:txBody>
+          <a:bodyPr wrap="square" lIns="0" tIns="0" rIns="0" bIns="0" rtlCol="0" anchor="ctr"/>
+          <a:lstStyle/>
+          <a:p>
+            <a:pPr marL="0" indent="0">
+              <a:buNone/>
+            </a:pPr>
+            <a:endParaRPr lang="en-US" sz="5000" dirty="0"/>
+          </a:p>
+        </p:txBody>
+      </p:sp>
+      <p:sp>
+        <p:nvSpPr>
+          <p:cNvPr id="5" name="Text 2"/>
+          <p:cNvSpPr/>
+          <p:nvPr/>
+        </p:nvSpPr>
+        <p:spPr>
+          <a:xfrm>
+            <a:off x="1803527" y="804672"/>
+            <a:ext cx="5943600" cy="777240"/>
+          </a:xfrm>
+          <a:prstGeom prst="rect">
+            <a:avLst/>
+          </a:prstGeom>
+          <a:noFill/>
+          <a:ln/>
+        </p:spPr>
+        <p:txBody>
+          <a:bodyPr wrap="square" lIns="0" tIns="0" rIns="0" bIns="0" rtlCol="0" anchor="ctr"/>
+          <a:lstStyle/>
+          <a:p>
+            <a:r>
+              <a:rPr lang="en-US" sz="5400" b="1" kern="0" spc="500" dirty="0">
+                <a:solidFill>
+                  <a:srgbClr val="FFFFFF"/>
+                </a:solidFill>
+              </a:rPr>
+              <a:t>TEŞEKKÜRLER</a:t>
+            </a:r>
+            <a:endParaRPr lang="en-US" sz="5400" dirty="0"/>
+          </a:p>
+          <a:p>
+            <a:pPr marL="0" indent="0">
+              <a:buNone/>
+            </a:pPr>
+            <a:endParaRPr lang="en-US" sz="5000" dirty="0"/>
+          </a:p>
+        </p:txBody>
+      </p:sp>
+      <p:sp>
+        <p:nvSpPr>
+          <p:cNvPr id="13" name="Shape 14">
+            <a:extLst>
+              <a:ext uri="{FF2B5EF4-FFF2-40B4-BE49-F238E27FC236}">
+                <a16:creationId xmlns:a16="http://schemas.microsoft.com/office/drawing/2014/main" id="{2052DFEA-4757-4CAD-8FD5-3505F8070A4B}"/>
+              </a:ext>
+            </a:extLst>
+          </p:cNvPr>
+          <p:cNvSpPr/>
+          <p:nvPr/>
+        </p:nvSpPr>
+        <p:spPr>
+          <a:xfrm>
+            <a:off x="956996" y="1972450"/>
+            <a:ext cx="3108960" cy="1691640"/>
+          </a:xfrm>
+          <a:prstGeom prst="rect">
+            <a:avLst/>
+          </a:prstGeom>
+          <a:solidFill>
+            <a:srgbClr val="0D1F3C"/>
+          </a:solidFill>
+          <a:ln w="12700">
+            <a:solidFill>
+              <a:srgbClr val="065A82"/>
+            </a:solidFill>
+            <a:prstDash val="solid"/>
+          </a:ln>
+        </p:spPr>
+        <p:txBody>
+          <a:bodyPr/>
+          <a:lstStyle/>
+          <a:p>
+            <a:endParaRPr lang="en-US" dirty="0"/>
+          </a:p>
+        </p:txBody>
+      </p:sp>
+      <p:sp>
+        <p:nvSpPr>
+          <p:cNvPr id="14" name="Text 15">
+            <a:extLst>
+              <a:ext uri="{FF2B5EF4-FFF2-40B4-BE49-F238E27FC236}">
+                <a16:creationId xmlns:a16="http://schemas.microsoft.com/office/drawing/2014/main" id="{83E9AC8F-459D-45FA-8C71-E6A76C370801}"/>
+              </a:ext>
+            </a:extLst>
+          </p:cNvPr>
+          <p:cNvSpPr/>
+          <p:nvPr/>
+        </p:nvSpPr>
+        <p:spPr>
+          <a:xfrm>
+            <a:off x="1076265" y="2120159"/>
+            <a:ext cx="2743200" cy="320040"/>
+          </a:xfrm>
+          <a:prstGeom prst="rect">
+            <a:avLst/>
+          </a:prstGeom>
+          <a:noFill/>
+          <a:ln/>
+        </p:spPr>
+        <p:txBody>
+          <a:bodyPr wrap="square" rtlCol="0" anchor="ctr"/>
+          <a:lstStyle/>
+          <a:p>
+            <a:pPr marL="0" indent="0">
+              <a:buNone/>
+            </a:pPr>
+            <a:r>
+              <a:rPr lang="en-US" sz="1100" b="1" dirty="0">
+                <a:solidFill>
+                  <a:srgbClr val="0ABFA3"/>
+                </a:solidFill>
+              </a:rPr>
+              <a:t>Kullanılan Teknolojiler</a:t>
+            </a:r>
+            <a:endParaRPr lang="en-US" sz="1100" dirty="0"/>
+          </a:p>
+        </p:txBody>
+      </p:sp>
+      <p:sp>
+        <p:nvSpPr>
+          <p:cNvPr id="15" name="Text 16">
+            <a:extLst>
+              <a:ext uri="{FF2B5EF4-FFF2-40B4-BE49-F238E27FC236}">
+                <a16:creationId xmlns:a16="http://schemas.microsoft.com/office/drawing/2014/main" id="{4E2D2B0B-2DAC-4687-A6AB-A51B380F8E0C}"/>
+              </a:ext>
+            </a:extLst>
+          </p:cNvPr>
+          <p:cNvSpPr/>
+          <p:nvPr/>
+        </p:nvSpPr>
+        <p:spPr>
+          <a:xfrm>
+            <a:off x="1002432" y="2543637"/>
+            <a:ext cx="2743200" cy="256032"/>
+          </a:xfrm>
+          <a:prstGeom prst="rect">
+            <a:avLst/>
+          </a:prstGeom>
+          <a:noFill/>
+          <a:ln/>
+        </p:spPr>
+        <p:txBody>
+          <a:bodyPr wrap="square" rtlCol="0" anchor="ctr"/>
+          <a:lstStyle/>
+          <a:p>
+            <a:pPr marL="0" indent="0">
+              <a:buNone/>
+            </a:pPr>
+            <a:r>
+              <a:rPr lang="en-US" sz="1000" dirty="0">
+                <a:solidFill>
+                  <a:srgbClr val="E8F4FD"/>
+                </a:solidFill>
+              </a:rPr>
+              <a:t>☕ Java 21</a:t>
+            </a:r>
+            <a:endParaRPr lang="en-US" sz="1000" dirty="0"/>
+          </a:p>
+        </p:txBody>
+      </p:sp>
+      <p:sp>
+        <p:nvSpPr>
+          <p:cNvPr id="16" name="Text 17">
+            <a:extLst>
+              <a:ext uri="{FF2B5EF4-FFF2-40B4-BE49-F238E27FC236}">
+                <a16:creationId xmlns:a16="http://schemas.microsoft.com/office/drawing/2014/main" id="{C375FCD2-C86A-4A4A-8F1B-5CEAC8A291F8}"/>
+              </a:ext>
+            </a:extLst>
+          </p:cNvPr>
+          <p:cNvSpPr/>
+          <p:nvPr/>
+        </p:nvSpPr>
+        <p:spPr>
+          <a:xfrm>
+            <a:off x="1002432" y="2799669"/>
+            <a:ext cx="2743200" cy="256032"/>
+          </a:xfrm>
+          <a:prstGeom prst="rect">
+            <a:avLst/>
+          </a:prstGeom>
+          <a:noFill/>
+          <a:ln/>
+        </p:spPr>
+        <p:txBody>
+          <a:bodyPr wrap="square" rtlCol="0" anchor="ctr"/>
+          <a:lstStyle/>
+          <a:p>
+            <a:pPr marL="0" indent="0">
+              <a:buNone/>
+            </a:pPr>
+            <a:r>
+              <a:rPr lang="en-US" sz="1000" dirty="0">
+                <a:solidFill>
+                  <a:srgbClr val="E8F4FD"/>
+                </a:solidFill>
+              </a:rPr>
+              <a:t>📦 Maven</a:t>
+            </a:r>
+            <a:endParaRPr lang="en-US" sz="1000" dirty="0"/>
+          </a:p>
+        </p:txBody>
+      </p:sp>
+      <p:sp>
+        <p:nvSpPr>
+          <p:cNvPr id="17" name="Text 18">
+            <a:extLst>
+              <a:ext uri="{FF2B5EF4-FFF2-40B4-BE49-F238E27FC236}">
+                <a16:creationId xmlns:a16="http://schemas.microsoft.com/office/drawing/2014/main" id="{DC7C7872-CE62-4E1A-8E7B-A2F21B1C9C91}"/>
+              </a:ext>
+            </a:extLst>
+          </p:cNvPr>
+          <p:cNvSpPr/>
+          <p:nvPr/>
+        </p:nvSpPr>
+        <p:spPr>
+          <a:xfrm>
+            <a:off x="956996" y="3055701"/>
+            <a:ext cx="2743200" cy="256032"/>
+          </a:xfrm>
+          <a:prstGeom prst="rect">
+            <a:avLst/>
+          </a:prstGeom>
+          <a:noFill/>
+          <a:ln/>
+        </p:spPr>
+        <p:txBody>
+          <a:bodyPr wrap="square" rtlCol="0" anchor="ctr"/>
+          <a:lstStyle/>
+          <a:p>
+            <a:pPr marL="0" indent="0">
+              <a:buNone/>
+            </a:pPr>
+            <a:r>
+              <a:rPr lang="en-US" sz="1000" dirty="0">
+                <a:solidFill>
+                  <a:srgbClr val="E8F4FD"/>
+                </a:solidFill>
+              </a:rPr>
+              <a:t>🧪 JUnit 5</a:t>
+            </a:r>
+            <a:endParaRPr lang="en-US" sz="1000" dirty="0"/>
+          </a:p>
+        </p:txBody>
+      </p:sp>
+      <p:sp>
+        <p:nvSpPr>
+          <p:cNvPr id="18" name="Text 19">
+            <a:extLst>
+              <a:ext uri="{FF2B5EF4-FFF2-40B4-BE49-F238E27FC236}">
+                <a16:creationId xmlns:a16="http://schemas.microsoft.com/office/drawing/2014/main" id="{8BCAC82E-8E37-42FA-82F6-01A908BBFA88}"/>
+              </a:ext>
+            </a:extLst>
+          </p:cNvPr>
+          <p:cNvSpPr/>
+          <p:nvPr/>
+        </p:nvSpPr>
+        <p:spPr>
+          <a:xfrm>
+            <a:off x="956996" y="3309362"/>
+            <a:ext cx="2743200" cy="256032"/>
+          </a:xfrm>
+          <a:prstGeom prst="rect">
+            <a:avLst/>
+          </a:prstGeom>
+          <a:noFill/>
+          <a:ln/>
+        </p:spPr>
+        <p:txBody>
+          <a:bodyPr wrap="square" rtlCol="0" anchor="ctr"/>
+          <a:lstStyle/>
+          <a:p>
+            <a:pPr marL="0" indent="0">
+              <a:buNone/>
+            </a:pPr>
+            <a:r>
+              <a:rPr lang="en-US" sz="1000" dirty="0">
+                <a:solidFill>
+                  <a:srgbClr val="E8F4FD"/>
+                </a:solidFill>
+              </a:rPr>
+              <a:t>🔗 Rest Assured 5.4</a:t>
+            </a:r>
+            <a:endParaRPr lang="en-US" sz="1000" dirty="0"/>
+          </a:p>
+        </p:txBody>
+      </p:sp>
+      <p:pic>
+        <p:nvPicPr>
+          <p:cNvPr id="20" name="Picture 19">
+            <a:extLst>
+              <a:ext uri="{FF2B5EF4-FFF2-40B4-BE49-F238E27FC236}">
+                <a16:creationId xmlns:a16="http://schemas.microsoft.com/office/drawing/2014/main" id="{625225D7-304F-4044-9561-78AB6B40516C}"/>
+              </a:ext>
+            </a:extLst>
+          </p:cNvPr>
+          <p:cNvPicPr>
+            <a:picLocks noChangeAspect="1"/>
+          </p:cNvPicPr>
+          <p:nvPr/>
+        </p:nvPicPr>
+        <p:blipFill>
+          <a:blip r:embed="rId3"/>
+          <a:stretch>
+            <a:fillRect/>
+          </a:stretch>
+        </p:blipFill>
+        <p:spPr>
+          <a:xfrm>
+            <a:off x="5445489" y="2015017"/>
+            <a:ext cx="3114675" cy="1695450"/>
+          </a:xfrm>
+          <a:prstGeom prst="rect">
+            <a:avLst/>
+          </a:prstGeom>
+        </p:spPr>
+      </p:pic>
+      <p:sp>
+        <p:nvSpPr>
+          <p:cNvPr id="21" name="Text 12">
+            <a:extLst>
+              <a:ext uri="{FF2B5EF4-FFF2-40B4-BE49-F238E27FC236}">
+                <a16:creationId xmlns:a16="http://schemas.microsoft.com/office/drawing/2014/main" id="{4A89279B-3E04-49BB-A4E8-8322E81BA96B}"/>
+              </a:ext>
+            </a:extLst>
+          </p:cNvPr>
+          <p:cNvSpPr/>
+          <p:nvPr/>
+        </p:nvSpPr>
+        <p:spPr>
+          <a:xfrm>
+            <a:off x="5585791" y="2177877"/>
+            <a:ext cx="2743200" cy="365760"/>
+          </a:xfrm>
+          <a:prstGeom prst="rect">
+            <a:avLst/>
+          </a:prstGeom>
+          <a:noFill/>
+          <a:ln/>
+        </p:spPr>
+        <p:txBody>
+          <a:bodyPr wrap="square" rtlCol="0" anchor="ctr"/>
+          <a:lstStyle/>
+          <a:p>
+            <a:pPr marL="0" indent="0">
+              <a:buNone/>
+            </a:pPr>
+            <a:r>
+              <a:rPr lang="en-US" sz="1400" b="1" dirty="0">
+                <a:solidFill>
+                  <a:srgbClr val="0ABFA3"/>
+                </a:solidFill>
+              </a:rPr>
+              <a:t>🐙 GitHub</a:t>
+            </a:r>
+            <a:endParaRPr lang="en-US" sz="1400" dirty="0"/>
+          </a:p>
+        </p:txBody>
+      </p:sp>
+      <p:sp>
+        <p:nvSpPr>
+          <p:cNvPr id="22" name="Text 13">
+            <a:extLst>
+              <a:ext uri="{FF2B5EF4-FFF2-40B4-BE49-F238E27FC236}">
+                <a16:creationId xmlns:a16="http://schemas.microsoft.com/office/drawing/2014/main" id="{E04DB4B3-4216-4C3B-B613-A1977B9286BD}"/>
+              </a:ext>
+            </a:extLst>
+          </p:cNvPr>
+          <p:cNvSpPr/>
+          <p:nvPr/>
+        </p:nvSpPr>
+        <p:spPr>
+          <a:xfrm>
+            <a:off x="5631226" y="2689941"/>
+            <a:ext cx="2743200" cy="731520"/>
+          </a:xfrm>
+          <a:prstGeom prst="rect">
+            <a:avLst/>
+          </a:prstGeom>
+          <a:noFill/>
+          <a:ln/>
+        </p:spPr>
+        <p:txBody>
+          <a:bodyPr wrap="square" rtlCol="0" anchor="ctr"/>
+          <a:lstStyle/>
+          <a:p>
+            <a:pPr marL="0" indent="0">
+              <a:buNone/>
+            </a:pPr>
+            <a:r>
+              <a:rPr lang="en-US" sz="1100" dirty="0">
+                <a:solidFill>
+                  <a:srgbClr val="E8F4FD"/>
+                </a:solidFill>
+              </a:rPr>
+              <a:t>github.com/</a:t>
+            </a:r>
+            <a:endParaRPr lang="en-US" sz="1100" dirty="0"/>
+          </a:p>
+          <a:p>
+            <a:pPr marL="0" indent="0">
+              <a:buNone/>
+            </a:pPr>
+            <a:r>
+              <a:rPr lang="en-US" sz="1100" dirty="0">
+                <a:solidFill>
+                  <a:srgbClr val="E8F4FD"/>
+                </a:solidFill>
+              </a:rPr>
+              <a:t>mxesaie/api-tests</a:t>
+            </a:r>
+            <a:endParaRPr lang="en-US" sz="1100" dirty="0"/>
+          </a:p>
+        </p:txBody>
+      </p:sp>
+    </p:spTree>
+    <p:extLst>
+      <p:ext uri="{BB962C8B-B14F-4D97-AF65-F5344CB8AC3E}">
+        <p14:creationId xmlns:p14="http://schemas.microsoft.com/office/powerpoint/2010/main" val="3925276483"/>
+      </p:ext>
+    </p:extLst>
   </p:cSld>
   <p:clrMapOvr>
     <a:masterClrMapping/>
@@ -7065,4 +7416,299 @@
     </a:ext>
   </a:extLst>
 </a:theme>
+</file>
+
+<file path=ppt/theme/theme2.xml><?xml version="1.0" encoding="utf-8"?>
+<a:theme xmlns:a="http://schemas.openxmlformats.org/drawingml/2006/main" name="Office Theme">
+  <a:themeElements>
+    <a:clrScheme name="Office">
+      <a:dk1>
+        <a:sysClr val="windowText" lastClr="000000"/>
+      </a:dk1>
+      <a:lt1>
+        <a:sysClr val="window" lastClr="FFFFFF"/>
+      </a:lt1>
+      <a:dk2>
+        <a:srgbClr val="44546A"/>
+      </a:dk2>
+      <a:lt2>
+        <a:srgbClr val="E7E6E6"/>
+      </a:lt2>
+      <a:accent1>
+        <a:srgbClr val="4472C4"/>
+      </a:accent1>
+      <a:accent2>
+        <a:srgbClr val="ED7D31"/>
+      </a:accent2>
+      <a:accent3>
+        <a:srgbClr val="A5A5A5"/>
+      </a:accent3>
+      <a:accent4>
+        <a:srgbClr val="FFC000"/>
+      </a:accent4>
+      <a:accent5>
+        <a:srgbClr val="5B9BD5"/>
+      </a:accent5>
+      <a:accent6>
+        <a:srgbClr val="70AD47"/>
+      </a:accent6>
+      <a:hlink>
+        <a:srgbClr val="0563C1"/>
+      </a:hlink>
+      <a:folHlink>
+        <a:srgbClr val="954F72"/>
+      </a:folHlink>
+    </a:clrScheme>
+    <a:fontScheme name="Office">
+      <a:majorFont>
+        <a:latin typeface="Calibri Light" panose="020F0302020204030204"/>
+        <a:ea typeface=""/>
+        <a:cs typeface=""/>
+        <a:font script="Jpan" typeface="游ゴシック Light"/>
+        <a:font script="Hang" typeface="맑은 고딕"/>
+        <a:font script="Hans" typeface="等线 Light"/>
+        <a:font script="Hant" typeface="新細明體"/>
+        <a:font script="Arab" typeface="Times New Roman"/>
+        <a:font script="Hebr" typeface="Times New Roman"/>
+        <a:font script="Thai" typeface="Angsana New"/>
+        <a:font script="Ethi" typeface="Nyala"/>
+        <a:font script="Beng" typeface="Vrinda"/>
+        <a:font script="Gujr" typeface="Shruti"/>
+        <a:font script="Khmr" typeface="MoolBoran"/>
+        <a:font script="Knda" typeface="Tunga"/>
+        <a:font script="Guru" typeface="Raavi"/>
+        <a:font script="Cans" typeface="Euphemia"/>
+        <a:font script="Cher" typeface="Plantagenet Cherokee"/>
+        <a:font script="Yiii" typeface="Microsoft Yi Baiti"/>
+        <a:font script="Tibt" typeface="Microsoft Himalaya"/>
+        <a:font script="Thaa" typeface="MV Boli"/>
+        <a:font script="Deva" typeface="Mangal"/>
+        <a:font script="Telu" typeface="Gautami"/>
+        <a:font script="Taml" typeface="Latha"/>
+        <a:font script="Syrc" typeface="Estrangelo Edessa"/>
+        <a:font script="Orya" typeface="Kalinga"/>
+        <a:font script="Mlym" typeface="Kartika"/>
+        <a:font script="Laoo" typeface="DokChampa"/>
+        <a:font script="Sinh" typeface="Iskoola Pota"/>
+        <a:font script="Mong" typeface="Mongolian Baiti"/>
+        <a:font script="Viet" typeface="Times New Roman"/>
+        <a:font script="Uigh" typeface="Microsoft Uighur"/>
+        <a:font script="Geor" typeface="Sylfaen"/>
+        <a:font script="Armn" typeface="Arial"/>
+        <a:font script="Bugi" typeface="Leelawadee UI"/>
+        <a:font script="Bopo" typeface="Microsoft JhengHei"/>
+        <a:font script="Java" typeface="Javanese Text"/>
+        <a:font script="Lisu" typeface="Segoe UI"/>
+        <a:font script="Mymr" typeface="Myanmar Text"/>
+        <a:font script="Nkoo" typeface="Ebrima"/>
+        <a:font script="Olck" typeface="Nirmala UI"/>
+        <a:font script="Osma" typeface="Ebrima"/>
+        <a:font script="Phag" typeface="Phagspa"/>
+        <a:font script="Syrn" typeface="Estrangelo Edessa"/>
+        <a:font script="Syrj" typeface="Estrangelo Edessa"/>
+        <a:font script="Syre" typeface="Estrangelo Edessa"/>
+        <a:font script="Sora" typeface="Nirmala UI"/>
+        <a:font script="Tale" typeface="Microsoft Tai Le"/>
+        <a:font script="Talu" typeface="Microsoft New Tai Lue"/>
+        <a:font script="Tfng" typeface="Ebrima"/>
+      </a:majorFont>
+      <a:minorFont>
+        <a:latin typeface="Calibri" panose="020F0502020204030204"/>
+        <a:ea typeface=""/>
+        <a:cs typeface=""/>
+        <a:font script="Jpan" typeface="游ゴシック"/>
+        <a:font script="Hang" typeface="맑은 고딕"/>
+        <a:font script="Hans" typeface="等线"/>
+        <a:font script="Hant" typeface="新細明體"/>
+        <a:font script="Arab" typeface="Arial"/>
+        <a:font script="Hebr" typeface="Arial"/>
+        <a:font script="Thai" typeface="Cordia New"/>
+        <a:font script="Ethi" typeface="Nyala"/>
+        <a:font script="Beng" typeface="Vrinda"/>
+        <a:font script="Gujr" typeface="Shruti"/>
+        <a:font script="Khmr" typeface="DaunPenh"/>
+        <a:font script="Knda" typeface="Tunga"/>
+        <a:font script="Guru" typeface="Raavi"/>
+        <a:font script="Cans" typeface="Euphemia"/>
+        <a:font script="Cher" typeface="Plantagenet Cherokee"/>
+        <a:font script="Yiii" typeface="Microsoft Yi Baiti"/>
+        <a:font script="Tibt" typeface="Microsoft Himalaya"/>
+        <a:font script="Thaa" typeface="MV Boli"/>
+        <a:font script="Deva" typeface="Mangal"/>
+        <a:font script="Telu" typeface="Gautami"/>
+        <a:font script="Taml" typeface="Latha"/>
+        <a:font script="Syrc" typeface="Estrangelo Edessa"/>
+        <a:font script="Orya" typeface="Kalinga"/>
+        <a:font script="Mlym" typeface="Kartika"/>
+        <a:font script="Laoo" typeface="DokChampa"/>
+        <a:font script="Sinh" typeface="Iskoola Pota"/>
+        <a:font script="Mong" typeface="Mongolian Baiti"/>
+        <a:font script="Viet" typeface="Arial"/>
+        <a:font script="Uigh" typeface="Microsoft Uighur"/>
+        <a:font script="Geor" typeface="Sylfaen"/>
+        <a:font script="Armn" typeface="Arial"/>
+        <a:font script="Bugi" typeface="Leelawadee UI"/>
+        <a:font script="Bopo" typeface="Microsoft JhengHei"/>
+        <a:font script="Java" typeface="Javanese Text"/>
+        <a:font script="Lisu" typeface="Segoe UI"/>
+        <a:font script="Mymr" typeface="Myanmar Text"/>
+        <a:font script="Nkoo" typeface="Ebrima"/>
+        <a:font script="Olck" typeface="Nirmala UI"/>
+        <a:font script="Osma" typeface="Ebrima"/>
+        <a:font script="Phag" typeface="Phagspa"/>
+        <a:font script="Syrn" typeface="Estrangelo Edessa"/>
+        <a:font script="Syrj" typeface="Estrangelo Edessa"/>
+        <a:font script="Syre" typeface="Estrangelo Edessa"/>
+        <a:font script="Sora" typeface="Nirmala UI"/>
+        <a:font script="Tale" typeface="Microsoft Tai Le"/>
+        <a:font script="Talu" typeface="Microsoft New Tai Lue"/>
+        <a:font script="Tfng" typeface="Ebrima"/>
+      </a:minorFont>
+    </a:fontScheme>
+    <a:fmtScheme name="Office">
+      <a:fillStyleLst>
+        <a:solidFill>
+          <a:schemeClr val="phClr"/>
+        </a:solidFill>
+        <a:gradFill rotWithShape="1">
+          <a:gsLst>
+            <a:gs pos="0">
+              <a:schemeClr val="phClr">
+                <a:lumMod val="110000"/>
+                <a:satMod val="105000"/>
+                <a:tint val="67000"/>
+              </a:schemeClr>
+            </a:gs>
+            <a:gs pos="50000">
+              <a:schemeClr val="phClr">
+                <a:lumMod val="105000"/>
+                <a:satMod val="103000"/>
+                <a:tint val="73000"/>
+              </a:schemeClr>
+            </a:gs>
+            <a:gs pos="100000">
+              <a:schemeClr val="phClr">
+                <a:lumMod val="105000"/>
+                <a:satMod val="109000"/>
+                <a:tint val="81000"/>
+              </a:schemeClr>
+            </a:gs>
+          </a:gsLst>
+          <a:lin ang="5400000" scaled="0"/>
+        </a:gradFill>
+        <a:gradFill rotWithShape="1">
+          <a:gsLst>
+            <a:gs pos="0">
+              <a:schemeClr val="phClr">
+                <a:satMod val="103000"/>
+                <a:lumMod val="102000"/>
+                <a:tint val="94000"/>
+              </a:schemeClr>
+            </a:gs>
+            <a:gs pos="50000">
+              <a:schemeClr val="phClr">
+                <a:satMod val="110000"/>
+                <a:lumMod val="100000"/>
+                <a:shade val="100000"/>
+              </a:schemeClr>
+            </a:gs>
+            <a:gs pos="100000">
+              <a:schemeClr val="phClr">
+                <a:lumMod val="99000"/>
+                <a:satMod val="120000"/>
+                <a:shade val="78000"/>
+              </a:schemeClr>
+            </a:gs>
+          </a:gsLst>
+          <a:lin ang="5400000" scaled="0"/>
+        </a:gradFill>
+      </a:fillStyleLst>
+      <a:lnStyleLst>
+        <a:ln w="6350" cap="flat" cmpd="sng" algn="ctr">
+          <a:solidFill>
+            <a:schemeClr val="phClr"/>
+          </a:solidFill>
+          <a:prstDash val="solid"/>
+          <a:miter lim="800000"/>
+        </a:ln>
+        <a:ln w="12700" cap="flat" cmpd="sng" algn="ctr">
+          <a:solidFill>
+            <a:schemeClr val="phClr"/>
+          </a:solidFill>
+          <a:prstDash val="solid"/>
+          <a:miter lim="800000"/>
+        </a:ln>
+        <a:ln w="19050" cap="flat" cmpd="sng" algn="ctr">
+          <a:solidFill>
+            <a:schemeClr val="phClr"/>
+          </a:solidFill>
+          <a:prstDash val="solid"/>
+          <a:miter lim="800000"/>
+        </a:ln>
+      </a:lnStyleLst>
+      <a:effectStyleLst>
+        <a:effectStyle>
+          <a:effectLst/>
+        </a:effectStyle>
+        <a:effectStyle>
+          <a:effectLst/>
+        </a:effectStyle>
+        <a:effectStyle>
+          <a:effectLst>
+            <a:outerShdw blurRad="57150" dist="19050" dir="5400000" algn="ctr" rotWithShape="0">
+              <a:srgbClr val="000000">
+                <a:alpha val="63000"/>
+              </a:srgbClr>
+            </a:outerShdw>
+          </a:effectLst>
+        </a:effectStyle>
+      </a:effectStyleLst>
+      <a:bgFillStyleLst>
+        <a:solidFill>
+          <a:schemeClr val="phClr"/>
+        </a:solidFill>
+        <a:solidFill>
+          <a:schemeClr val="phClr">
+            <a:tint val="95000"/>
+            <a:satMod val="170000"/>
+          </a:schemeClr>
+        </a:solidFill>
+        <a:gradFill rotWithShape="1">
+          <a:gsLst>
+            <a:gs pos="0">
+              <a:schemeClr val="phClr">
+                <a:tint val="93000"/>
+                <a:satMod val="150000"/>
+                <a:shade val="98000"/>
+                <a:lumMod val="102000"/>
+              </a:schemeClr>
+            </a:gs>
+            <a:gs pos="50000">
+              <a:schemeClr val="phClr">
+                <a:tint val="98000"/>
+                <a:satMod val="130000"/>
+                <a:shade val="90000"/>
+                <a:lumMod val="103000"/>
+              </a:schemeClr>
+            </a:gs>
+            <a:gs pos="100000">
+              <a:schemeClr val="phClr">
+                <a:shade val="63000"/>
+                <a:satMod val="120000"/>
+              </a:schemeClr>
+            </a:gs>
+          </a:gsLst>
+          <a:lin ang="5400000" scaled="0"/>
+        </a:gradFill>
+      </a:bgFillStyleLst>
+    </a:fmtScheme>
+  </a:themeElements>
+  <a:objectDefaults/>
+  <a:extraClrSchemeLst/>
+  <a:extLst>
+    <a:ext uri="{05A4C25C-085E-4340-85A3-A5531E510DB2}">
+      <thm15:themeFamily xmlns:thm15="http://schemas.microsoft.com/office/thememl/2012/main" name="Office Theme" id="{62F939B6-93AF-4DB8-9C6B-D6C7DFDC589F}" vid="{4A3C46E8-61CC-4603-A589-7422A47A8E4A}"/>
+    </a:ext>
+  </a:extLst>
+</a:theme>
 </file>